--- a/374 DS in detail.pptx
+++ b/374 DS in detail.pptx
@@ -49,7 +49,29 @@
     <p:sldId id="352" r:id="rId43"/>
     <p:sldId id="350" r:id="rId44"/>
     <p:sldId id="351" r:id="rId45"/>
-    <p:sldId id="324" r:id="rId46"/>
+    <p:sldId id="360" r:id="rId46"/>
+    <p:sldId id="353" r:id="rId47"/>
+    <p:sldId id="359" r:id="rId48"/>
+    <p:sldId id="354" r:id="rId49"/>
+    <p:sldId id="357" r:id="rId50"/>
+    <p:sldId id="361" r:id="rId51"/>
+    <p:sldId id="355" r:id="rId52"/>
+    <p:sldId id="358" r:id="rId53"/>
+    <p:sldId id="362" r:id="rId54"/>
+    <p:sldId id="363" r:id="rId55"/>
+    <p:sldId id="366" r:id="rId56"/>
+    <p:sldId id="365" r:id="rId57"/>
+    <p:sldId id="364" r:id="rId58"/>
+    <p:sldId id="367" r:id="rId59"/>
+    <p:sldId id="368" r:id="rId60"/>
+    <p:sldId id="369" r:id="rId61"/>
+    <p:sldId id="374" r:id="rId62"/>
+    <p:sldId id="370" r:id="rId63"/>
+    <p:sldId id="372" r:id="rId64"/>
+    <p:sldId id="375" r:id="rId65"/>
+    <p:sldId id="376" r:id="rId66"/>
+    <p:sldId id="371" r:id="rId67"/>
+    <p:sldId id="324" r:id="rId68"/>
   </p:sldIdLst>
   <p:sldSz cx="12192000" cy="6858000"/>
   <p:notesSz cx="6858000" cy="9144000"/>
@@ -303,7 +325,7 @@
           <a:p>
             <a:fld id="{77EE7D20-2DA8-734D-A950-8DD41E3ED5DB}" type="datetimeFigureOut">
               <a:rPr lang="en-US" smtClean="0"/>
-              <a:t>2/25/26</a:t>
+              <a:t>3/2/26</a:t>
             </a:fld>
             <a:endParaRPr lang="en-US"/>
           </a:p>
@@ -501,7 +523,7 @@
           <a:p>
             <a:fld id="{77EE7D20-2DA8-734D-A950-8DD41E3ED5DB}" type="datetimeFigureOut">
               <a:rPr lang="en-US" smtClean="0"/>
-              <a:t>2/25/26</a:t>
+              <a:t>3/2/26</a:t>
             </a:fld>
             <a:endParaRPr lang="en-US"/>
           </a:p>
@@ -709,7 +731,7 @@
           <a:p>
             <a:fld id="{77EE7D20-2DA8-734D-A950-8DD41E3ED5DB}" type="datetimeFigureOut">
               <a:rPr lang="en-US" smtClean="0"/>
-              <a:t>2/25/26</a:t>
+              <a:t>3/2/26</a:t>
             </a:fld>
             <a:endParaRPr lang="en-US"/>
           </a:p>
@@ -907,7 +929,7 @@
           <a:p>
             <a:fld id="{77EE7D20-2DA8-734D-A950-8DD41E3ED5DB}" type="datetimeFigureOut">
               <a:rPr lang="en-US" smtClean="0"/>
-              <a:t>2/25/26</a:t>
+              <a:t>3/2/26</a:t>
             </a:fld>
             <a:endParaRPr lang="en-US"/>
           </a:p>
@@ -1182,7 +1204,7 @@
           <a:p>
             <a:fld id="{77EE7D20-2DA8-734D-A950-8DD41E3ED5DB}" type="datetimeFigureOut">
               <a:rPr lang="en-US" smtClean="0"/>
-              <a:t>2/25/26</a:t>
+              <a:t>3/2/26</a:t>
             </a:fld>
             <a:endParaRPr lang="en-US"/>
           </a:p>
@@ -1447,7 +1469,7 @@
           <a:p>
             <a:fld id="{77EE7D20-2DA8-734D-A950-8DD41E3ED5DB}" type="datetimeFigureOut">
               <a:rPr lang="en-US" smtClean="0"/>
-              <a:t>2/25/26</a:t>
+              <a:t>3/2/26</a:t>
             </a:fld>
             <a:endParaRPr lang="en-US"/>
           </a:p>
@@ -1859,7 +1881,7 @@
           <a:p>
             <a:fld id="{77EE7D20-2DA8-734D-A950-8DD41E3ED5DB}" type="datetimeFigureOut">
               <a:rPr lang="en-US" smtClean="0"/>
-              <a:t>2/25/26</a:t>
+              <a:t>3/2/26</a:t>
             </a:fld>
             <a:endParaRPr lang="en-US"/>
           </a:p>
@@ -2000,7 +2022,7 @@
           <a:p>
             <a:fld id="{77EE7D20-2DA8-734D-A950-8DD41E3ED5DB}" type="datetimeFigureOut">
               <a:rPr lang="en-US" smtClean="0"/>
-              <a:t>2/25/26</a:t>
+              <a:t>3/2/26</a:t>
             </a:fld>
             <a:endParaRPr lang="en-US"/>
           </a:p>
@@ -2113,7 +2135,7 @@
           <a:p>
             <a:fld id="{77EE7D20-2DA8-734D-A950-8DD41E3ED5DB}" type="datetimeFigureOut">
               <a:rPr lang="en-US" smtClean="0"/>
-              <a:t>2/25/26</a:t>
+              <a:t>3/2/26</a:t>
             </a:fld>
             <a:endParaRPr lang="en-US"/>
           </a:p>
@@ -2424,7 +2446,7 @@
           <a:p>
             <a:fld id="{77EE7D20-2DA8-734D-A950-8DD41E3ED5DB}" type="datetimeFigureOut">
               <a:rPr lang="en-US" smtClean="0"/>
-              <a:t>2/25/26</a:t>
+              <a:t>3/2/26</a:t>
             </a:fld>
             <a:endParaRPr lang="en-US"/>
           </a:p>
@@ -2712,7 +2734,7 @@
           <a:p>
             <a:fld id="{77EE7D20-2DA8-734D-A950-8DD41E3ED5DB}" type="datetimeFigureOut">
               <a:rPr lang="en-US" smtClean="0"/>
-              <a:t>2/25/26</a:t>
+              <a:t>3/2/26</a:t>
             </a:fld>
             <a:endParaRPr lang="en-US"/>
           </a:p>
@@ -2953,7 +2975,7 @@
           <a:p>
             <a:fld id="{77EE7D20-2DA8-734D-A950-8DD41E3ED5DB}" type="datetimeFigureOut">
               <a:rPr lang="en-US" smtClean="0"/>
-              <a:t>2/25/26</a:t>
+              <a:t>3/2/26</a:t>
             </a:fld>
             <a:endParaRPr lang="en-US"/>
           </a:p>
@@ -7218,8 +7240,8 @@
           </a:p>
         </p:txBody>
       </p:sp>
-      <mc:AlternateContent xmlns:mc="http://schemas.openxmlformats.org/markup-compatibility/2006">
-        <mc:Choice xmlns:a14="http://schemas.microsoft.com/office/drawing/2010/main" Requires="a14">
+      <mc:AlternateContent xmlns:mc="http://schemas.openxmlformats.org/markup-compatibility/2006" xmlns:a14="http://schemas.microsoft.com/office/drawing/2010/main">
+        <mc:Choice Requires="a14">
           <p:sp>
             <p:nvSpPr>
               <p:cNvPr id="5" name="Content Placeholder 4">
@@ -7427,6 +7449,7 @@
                     </m:r>
                   </m:oMath>
                 </a14:m>
+                <a:endParaRPr lang="en-US" dirty="0"/>
               </a:p>
               <a:p>
                 <a:r>
@@ -7463,7 +7486,7 @@
             </p:txBody>
           </p:sp>
         </mc:Choice>
-        <mc:Fallback>
+        <mc:Fallback xmlns="">
           <p:sp>
             <p:nvSpPr>
               <p:cNvPr id="5" name="Content Placeholder 4">
@@ -8299,8 +8322,8 @@
           </a:p>
         </p:txBody>
       </p:sp>
-      <mc:AlternateContent xmlns:mc="http://schemas.openxmlformats.org/markup-compatibility/2006">
-        <mc:Choice xmlns:a14="http://schemas.microsoft.com/office/drawing/2010/main" Requires="a14">
+      <mc:AlternateContent xmlns:mc="http://schemas.openxmlformats.org/markup-compatibility/2006" xmlns:a14="http://schemas.microsoft.com/office/drawing/2010/main">
+        <mc:Choice Requires="a14">
           <p:sp>
             <p:nvSpPr>
               <p:cNvPr id="3" name="Content Placeholder 2">
@@ -8391,7 +8414,7 @@
                           <a:rPr lang="en-US" b="0" i="1" dirty="0" smtClean="0">
                             <a:latin typeface="Cambria Math" panose="02040503050406030204" pitchFamily="18" charset="0"/>
                           </a:rPr>
-                          <m:t>-2</m:t>
+                          <m:t>−2</m:t>
                         </m:r>
                       </m:num>
                       <m:den>
@@ -8478,7 +8501,7 @@
             </p:txBody>
           </p:sp>
         </mc:Choice>
-        <mc:Fallback>
+        <mc:Fallback xmlns="">
           <p:sp>
             <p:nvSpPr>
               <p:cNvPr id="3" name="Content Placeholder 2">
@@ -9602,10 +9625,10 @@
       </p:grpSpPr>
       <p:sp>
         <p:nvSpPr>
-          <p:cNvPr id="4" name="Title 3">
-            <a:extLst>
-              <a:ext uri="{FF2B5EF4-FFF2-40B4-BE49-F238E27FC236}">
-                <a16:creationId xmlns:a16="http://schemas.microsoft.com/office/drawing/2014/main" id="{1AB13D4F-4B54-2CFD-45CE-D820434DD421}"/>
+          <p:cNvPr id="2" name="Title 1">
+            <a:extLst>
+              <a:ext uri="{FF2B5EF4-FFF2-40B4-BE49-F238E27FC236}">
+                <a16:creationId xmlns:a16="http://schemas.microsoft.com/office/drawing/2014/main" id="{7EB22117-3266-BA80-50F7-93BBE7F7C58D}"/>
               </a:ext>
             </a:extLst>
           </p:cNvPr>
@@ -9623,40 +9646,486 @@
           <a:p>
             <a:r>
               <a:rPr lang="en-US" dirty="0"/>
-              <a:t>These slides are work-in-progress; more will be added</a:t>
-            </a:r>
-          </a:p>
-        </p:txBody>
-      </p:sp>
-      <p:sp>
-        <p:nvSpPr>
-          <p:cNvPr id="5" name="Text Placeholder 4">
-            <a:extLst>
-              <a:ext uri="{FF2B5EF4-FFF2-40B4-BE49-F238E27FC236}">
-                <a16:creationId xmlns:a16="http://schemas.microsoft.com/office/drawing/2014/main" id="{4E8CBB95-B5A0-4E31-8197-E2631EE1CA41}"/>
-              </a:ext>
-            </a:extLst>
-          </p:cNvPr>
-          <p:cNvSpPr>
-            <a:spLocks noGrp="1"/>
-          </p:cNvSpPr>
-          <p:nvPr>
-            <p:ph type="body" idx="1"/>
-          </p:nvPr>
-        </p:nvSpPr>
-        <p:spPr/>
-        <p:txBody>
-          <a:bodyPr/>
-          <a:lstStyle/>
-          <a:p>
-            <a:endParaRPr lang="en-US"/>
+              <a:t>Warm-up: Does heap insert order matter?</a:t>
+            </a:r>
+          </a:p>
+        </p:txBody>
+      </p:sp>
+      <p:sp>
+        <p:nvSpPr>
+          <p:cNvPr id="3" name="Content Placeholder 2">
+            <a:extLst>
+              <a:ext uri="{FF2B5EF4-FFF2-40B4-BE49-F238E27FC236}">
+                <a16:creationId xmlns:a16="http://schemas.microsoft.com/office/drawing/2014/main" id="{A5F03DE8-4973-A76F-1B4A-49C932425EFA}"/>
+              </a:ext>
+            </a:extLst>
+          </p:cNvPr>
+          <p:cNvSpPr>
+            <a:spLocks noGrp="1"/>
+          </p:cNvSpPr>
+          <p:nvPr>
+            <p:ph idx="1"/>
+          </p:nvPr>
+        </p:nvSpPr>
+        <p:spPr/>
+        <p:txBody>
+          <a:bodyPr>
+            <a:normAutofit/>
+          </a:bodyPr>
+          <a:lstStyle/>
+          <a:p>
+            <a:r>
+              <a:rPr lang="en-US" dirty="0"/>
+              <a:t>Insert the following lists of numbers into a heap. Do they produce the same heap?</a:t>
+            </a:r>
+          </a:p>
+          <a:p>
+            <a:pPr marL="514350" indent="-514350">
+              <a:buAutoNum type="alphaUcPeriod"/>
+            </a:pPr>
+            <a:r>
+              <a:rPr lang="en-US" dirty="0"/>
+              <a:t>19, 27, 13, 26, 11, 24, 18, 10,  1, 30, 28, 14,  5, 15,  4,  8, 12, 23</a:t>
+            </a:r>
+            <a:br>
+              <a:rPr lang="en-US" dirty="0"/>
+            </a:br>
+            <a:endParaRPr lang="en-US" dirty="0"/>
+          </a:p>
+          <a:p>
+            <a:pPr marL="514350" indent="-514350">
+              <a:buAutoNum type="alphaUcPeriod"/>
+            </a:pPr>
+            <a:r>
+              <a:rPr lang="en-US" dirty="0"/>
+              <a:t>11,  1,  8,  5, 10, 24, 14, 18, 26,  4, 19, 13, 15, 30, 27, 23, 28, 12</a:t>
+            </a:r>
+            <a:br>
+              <a:rPr lang="en-US" dirty="0"/>
+            </a:br>
+            <a:endParaRPr lang="en-US" dirty="0"/>
+          </a:p>
+          <a:p>
+            <a:pPr marL="514350" indent="-514350">
+              <a:buAutoNum type="alphaUcPeriod"/>
+            </a:pPr>
+            <a:r>
+              <a:rPr lang="en-US" dirty="0"/>
+              <a:t>24, 27, 11,  4,  8,  5,  1, 23, 12, 30, 18, 28, 19, 15, 14, 10, 13, 26</a:t>
+            </a:r>
           </a:p>
         </p:txBody>
       </p:sp>
     </p:spTree>
     <p:extLst>
       <p:ext uri="{BB962C8B-B14F-4D97-AF65-F5344CB8AC3E}">
-        <p14:creationId xmlns:p14="http://schemas.microsoft.com/office/powerpoint/2010/main" val="661472011"/>
+        <p14:creationId xmlns:p14="http://schemas.microsoft.com/office/powerpoint/2010/main" val="2898668923"/>
+      </p:ext>
+    </p:extLst>
+  </p:cSld>
+  <p:clrMapOvr>
+    <a:masterClrMapping/>
+  </p:clrMapOvr>
+</p:sld>
+</file>
+
+<file path=ppt/slides/slide46.xml><?xml version="1.0" encoding="utf-8"?>
+<p:sld xmlns:a="http://schemas.openxmlformats.org/drawingml/2006/main" xmlns:r="http://schemas.openxmlformats.org/officeDocument/2006/relationships" xmlns:p="http://schemas.openxmlformats.org/presentationml/2006/main">
+  <p:cSld>
+    <p:spTree>
+      <p:nvGrpSpPr>
+        <p:cNvPr id="1" name=""/>
+        <p:cNvGrpSpPr/>
+        <p:nvPr/>
+      </p:nvGrpSpPr>
+      <p:grpSpPr>
+        <a:xfrm>
+          <a:off x="0" y="0"/>
+          <a:ext cx="0" cy="0"/>
+          <a:chOff x="0" y="0"/>
+          <a:chExt cx="0" cy="0"/>
+        </a:xfrm>
+      </p:grpSpPr>
+      <p:sp>
+        <p:nvSpPr>
+          <p:cNvPr id="2" name="Title 1">
+            <a:extLst>
+              <a:ext uri="{FF2B5EF4-FFF2-40B4-BE49-F238E27FC236}">
+                <a16:creationId xmlns:a16="http://schemas.microsoft.com/office/drawing/2014/main" id="{B8AADCDC-DDF4-E5C3-74F0-53E245950B15}"/>
+              </a:ext>
+            </a:extLst>
+          </p:cNvPr>
+          <p:cNvSpPr>
+            <a:spLocks noGrp="1"/>
+          </p:cNvSpPr>
+          <p:nvPr>
+            <p:ph type="title"/>
+          </p:nvPr>
+        </p:nvSpPr>
+        <p:spPr/>
+        <p:txBody>
+          <a:bodyPr/>
+          <a:lstStyle/>
+          <a:p>
+            <a:r>
+              <a:rPr lang="en-US" dirty="0"/>
+              <a:t>Union-Find / Disjoint Sets</a:t>
+            </a:r>
+          </a:p>
+        </p:txBody>
+      </p:sp>
+      <p:sp>
+        <p:nvSpPr>
+          <p:cNvPr id="3" name="Text Placeholder 2">
+            <a:extLst>
+              <a:ext uri="{FF2B5EF4-FFF2-40B4-BE49-F238E27FC236}">
+                <a16:creationId xmlns:a16="http://schemas.microsoft.com/office/drawing/2014/main" id="{09CE19C8-ED1A-29F3-66DC-4F8E855FA506}"/>
+              </a:ext>
+            </a:extLst>
+          </p:cNvPr>
+          <p:cNvSpPr>
+            <a:spLocks noGrp="1"/>
+          </p:cNvSpPr>
+          <p:nvPr>
+            <p:ph type="body" idx="1"/>
+          </p:nvPr>
+        </p:nvSpPr>
+        <p:spPr/>
+        <p:txBody>
+          <a:bodyPr/>
+          <a:lstStyle/>
+          <a:p>
+            <a:endParaRPr lang="en-US"/>
+          </a:p>
+        </p:txBody>
+      </p:sp>
+    </p:spTree>
+    <p:extLst>
+      <p:ext uri="{BB962C8B-B14F-4D97-AF65-F5344CB8AC3E}">
+        <p14:creationId xmlns:p14="http://schemas.microsoft.com/office/powerpoint/2010/main" val="2848189835"/>
+      </p:ext>
+    </p:extLst>
+  </p:cSld>
+  <p:clrMapOvr>
+    <a:masterClrMapping/>
+  </p:clrMapOvr>
+</p:sld>
+</file>
+
+<file path=ppt/slides/slide47.xml><?xml version="1.0" encoding="utf-8"?>
+<p:sld xmlns:a="http://schemas.openxmlformats.org/drawingml/2006/main" xmlns:r="http://schemas.openxmlformats.org/officeDocument/2006/relationships" xmlns:p="http://schemas.openxmlformats.org/presentationml/2006/main">
+  <p:cSld>
+    <p:spTree>
+      <p:nvGrpSpPr>
+        <p:cNvPr id="1" name=""/>
+        <p:cNvGrpSpPr/>
+        <p:nvPr/>
+      </p:nvGrpSpPr>
+      <p:grpSpPr>
+        <a:xfrm>
+          <a:off x="0" y="0"/>
+          <a:ext cx="0" cy="0"/>
+          <a:chOff x="0" y="0"/>
+          <a:chExt cx="0" cy="0"/>
+        </a:xfrm>
+      </p:grpSpPr>
+      <p:sp>
+        <p:nvSpPr>
+          <p:cNvPr id="2" name="Title 1">
+            <a:extLst>
+              <a:ext uri="{FF2B5EF4-FFF2-40B4-BE49-F238E27FC236}">
+                <a16:creationId xmlns:a16="http://schemas.microsoft.com/office/drawing/2014/main" id="{70A89873-DCF1-A1D7-C885-CED6C3C0E1A6}"/>
+              </a:ext>
+            </a:extLst>
+          </p:cNvPr>
+          <p:cNvSpPr>
+            <a:spLocks noGrp="1"/>
+          </p:cNvSpPr>
+          <p:nvPr>
+            <p:ph type="title"/>
+          </p:nvPr>
+        </p:nvSpPr>
+        <p:spPr/>
+        <p:txBody>
+          <a:bodyPr/>
+          <a:lstStyle/>
+          <a:p>
+            <a:r>
+              <a:rPr lang="en-US" dirty="0"/>
+              <a:t>Outline</a:t>
+            </a:r>
+          </a:p>
+        </p:txBody>
+      </p:sp>
+      <p:sp>
+        <p:nvSpPr>
+          <p:cNvPr id="3" name="Content Placeholder 2">
+            <a:extLst>
+              <a:ext uri="{FF2B5EF4-FFF2-40B4-BE49-F238E27FC236}">
+                <a16:creationId xmlns:a16="http://schemas.microsoft.com/office/drawing/2014/main" id="{5CB6796F-62AC-EFA7-F217-F54E973E662A}"/>
+              </a:ext>
+            </a:extLst>
+          </p:cNvPr>
+          <p:cNvSpPr>
+            <a:spLocks noGrp="1"/>
+          </p:cNvSpPr>
+          <p:nvPr>
+            <p:ph idx="1"/>
+          </p:nvPr>
+        </p:nvSpPr>
+        <p:spPr/>
+        <p:txBody>
+          <a:bodyPr/>
+          <a:lstStyle/>
+          <a:p>
+            <a:r>
+              <a:rPr lang="en-US" dirty="0"/>
+              <a:t>Analogy</a:t>
+            </a:r>
+          </a:p>
+          <a:p>
+            <a:r>
+              <a:rPr lang="en-US" dirty="0"/>
+              <a:t>Trees</a:t>
+            </a:r>
+          </a:p>
+          <a:p>
+            <a:r>
+              <a:rPr lang="en-US" dirty="0"/>
+              <a:t>In arrays</a:t>
+            </a:r>
+          </a:p>
+          <a:p>
+            <a:r>
+              <a:rPr lang="en-US" dirty="0"/>
+              <a:t>Code</a:t>
+            </a:r>
+          </a:p>
+          <a:p>
+            <a:r>
+              <a:rPr lang="en-US" dirty="0"/>
+              <a:t>Optimizations</a:t>
+            </a:r>
+          </a:p>
+          <a:p>
+            <a:endParaRPr lang="en-US" dirty="0"/>
+          </a:p>
+        </p:txBody>
+      </p:sp>
+    </p:spTree>
+    <p:extLst>
+      <p:ext uri="{BB962C8B-B14F-4D97-AF65-F5344CB8AC3E}">
+        <p14:creationId xmlns:p14="http://schemas.microsoft.com/office/powerpoint/2010/main" val="3205267978"/>
+      </p:ext>
+    </p:extLst>
+  </p:cSld>
+  <p:clrMapOvr>
+    <a:masterClrMapping/>
+  </p:clrMapOvr>
+</p:sld>
+</file>
+
+<file path=ppt/slides/slide48.xml><?xml version="1.0" encoding="utf-8"?>
+<p:sld xmlns:a="http://schemas.openxmlformats.org/drawingml/2006/main" xmlns:r="http://schemas.openxmlformats.org/officeDocument/2006/relationships" xmlns:p="http://schemas.openxmlformats.org/presentationml/2006/main">
+  <p:cSld>
+    <p:spTree>
+      <p:nvGrpSpPr>
+        <p:cNvPr id="1" name=""/>
+        <p:cNvGrpSpPr/>
+        <p:nvPr/>
+      </p:nvGrpSpPr>
+      <p:grpSpPr>
+        <a:xfrm>
+          <a:off x="0" y="0"/>
+          <a:ext cx="0" cy="0"/>
+          <a:chOff x="0" y="0"/>
+          <a:chExt cx="0" cy="0"/>
+        </a:xfrm>
+      </p:grpSpPr>
+      <p:sp>
+        <p:nvSpPr>
+          <p:cNvPr id="2" name="Title 1">
+            <a:extLst>
+              <a:ext uri="{FF2B5EF4-FFF2-40B4-BE49-F238E27FC236}">
+                <a16:creationId xmlns:a16="http://schemas.microsoft.com/office/drawing/2014/main" id="{2B626F82-C1F8-7854-C7B9-C0C76CA265D2}"/>
+              </a:ext>
+            </a:extLst>
+          </p:cNvPr>
+          <p:cNvSpPr>
+            <a:spLocks noGrp="1"/>
+          </p:cNvSpPr>
+          <p:nvPr>
+            <p:ph type="title"/>
+          </p:nvPr>
+        </p:nvSpPr>
+        <p:spPr/>
+        <p:txBody>
+          <a:bodyPr/>
+          <a:lstStyle/>
+          <a:p>
+            <a:r>
+              <a:rPr lang="en-US" dirty="0"/>
+              <a:t>Let's start a company</a:t>
+            </a:r>
+          </a:p>
+        </p:txBody>
+      </p:sp>
+      <p:sp>
+        <p:nvSpPr>
+          <p:cNvPr id="3" name="Content Placeholder 2">
+            <a:extLst>
+              <a:ext uri="{FF2B5EF4-FFF2-40B4-BE49-F238E27FC236}">
+                <a16:creationId xmlns:a16="http://schemas.microsoft.com/office/drawing/2014/main" id="{F11E03DA-3632-6771-73CD-9D8454DEA974}"/>
+              </a:ext>
+            </a:extLst>
+          </p:cNvPr>
+          <p:cNvSpPr>
+            <a:spLocks noGrp="1"/>
+          </p:cNvSpPr>
+          <p:nvPr>
+            <p:ph idx="1"/>
+          </p:nvPr>
+        </p:nvSpPr>
+        <p:spPr/>
+        <p:txBody>
+          <a:bodyPr/>
+          <a:lstStyle/>
+          <a:p>
+            <a:r>
+              <a:rPr lang="en-US" dirty="0"/>
+              <a:t>You're wondering why I've brought you all here today…</a:t>
+            </a:r>
+          </a:p>
+          <a:p>
+            <a:pPr lvl="1"/>
+            <a:r>
+              <a:rPr lang="en-US" dirty="0"/>
+              <a:t>Everyone is working on something different.</a:t>
+            </a:r>
+          </a:p>
+          <a:p>
+            <a:pPr lvl="1"/>
+            <a:r>
+              <a:rPr lang="en-US" dirty="0"/>
+              <a:t>You get a number 1-26 to represent your various projects/</a:t>
+            </a:r>
+            <a:r>
+              <a:rPr lang="en-US" dirty="0" err="1"/>
+              <a:t>expertises</a:t>
+            </a:r>
+            <a:endParaRPr lang="en-US" dirty="0"/>
+          </a:p>
+        </p:txBody>
+      </p:sp>
+    </p:spTree>
+    <p:extLst>
+      <p:ext uri="{BB962C8B-B14F-4D97-AF65-F5344CB8AC3E}">
+        <p14:creationId xmlns:p14="http://schemas.microsoft.com/office/powerpoint/2010/main" val="3793731716"/>
+      </p:ext>
+    </p:extLst>
+  </p:cSld>
+  <p:clrMapOvr>
+    <a:masterClrMapping/>
+  </p:clrMapOvr>
+</p:sld>
+</file>
+
+<file path=ppt/slides/slide49.xml><?xml version="1.0" encoding="utf-8"?>
+<p:sld xmlns:a="http://schemas.openxmlformats.org/drawingml/2006/main" xmlns:r="http://schemas.openxmlformats.org/officeDocument/2006/relationships" xmlns:p="http://schemas.openxmlformats.org/presentationml/2006/main">
+  <p:cSld>
+    <p:spTree>
+      <p:nvGrpSpPr>
+        <p:cNvPr id="1" name=""/>
+        <p:cNvGrpSpPr/>
+        <p:nvPr/>
+      </p:nvGrpSpPr>
+      <p:grpSpPr>
+        <a:xfrm>
+          <a:off x="0" y="0"/>
+          <a:ext cx="0" cy="0"/>
+          <a:chOff x="0" y="0"/>
+          <a:chExt cx="0" cy="0"/>
+        </a:xfrm>
+      </p:grpSpPr>
+      <p:sp>
+        <p:nvSpPr>
+          <p:cNvPr id="2" name="Title 1">
+            <a:extLst>
+              <a:ext uri="{FF2B5EF4-FFF2-40B4-BE49-F238E27FC236}">
+                <a16:creationId xmlns:a16="http://schemas.microsoft.com/office/drawing/2014/main" id="{AFD0A092-8B25-F7AA-6CAB-28D90914E63A}"/>
+              </a:ext>
+            </a:extLst>
+          </p:cNvPr>
+          <p:cNvSpPr>
+            <a:spLocks noGrp="1"/>
+          </p:cNvSpPr>
+          <p:nvPr>
+            <p:ph type="title"/>
+          </p:nvPr>
+        </p:nvSpPr>
+        <p:spPr/>
+        <p:txBody>
+          <a:bodyPr/>
+          <a:lstStyle/>
+          <a:p>
+            <a:r>
+              <a:rPr lang="en-US" dirty="0"/>
+              <a:t>Let's start a company</a:t>
+            </a:r>
+          </a:p>
+        </p:txBody>
+      </p:sp>
+      <p:sp>
+        <p:nvSpPr>
+          <p:cNvPr id="3" name="Content Placeholder 2">
+            <a:extLst>
+              <a:ext uri="{FF2B5EF4-FFF2-40B4-BE49-F238E27FC236}">
+                <a16:creationId xmlns:a16="http://schemas.microsoft.com/office/drawing/2014/main" id="{D2ADC5A8-26EF-8AC5-A38C-EA57C3688F91}"/>
+              </a:ext>
+            </a:extLst>
+          </p:cNvPr>
+          <p:cNvSpPr>
+            <a:spLocks noGrp="1"/>
+          </p:cNvSpPr>
+          <p:nvPr>
+            <p:ph idx="1"/>
+          </p:nvPr>
+        </p:nvSpPr>
+        <p:spPr/>
+        <p:txBody>
+          <a:bodyPr/>
+          <a:lstStyle/>
+          <a:p>
+            <a:r>
+              <a:rPr lang="en-US" dirty="0"/>
+              <a:t>Hang on, some of you are working on similar things.</a:t>
+            </a:r>
+          </a:p>
+          <a:p>
+            <a:r>
+              <a:rPr lang="en-US" dirty="0"/>
+              <a:t>I will put you in different "departments"</a:t>
+            </a:r>
+          </a:p>
+          <a:p>
+            <a:pPr lvl="1"/>
+            <a:r>
+              <a:rPr lang="en-US" dirty="0"/>
+              <a:t>pairs/groups of 3</a:t>
+            </a:r>
+          </a:p>
+          <a:p>
+            <a:endParaRPr lang="en-US" dirty="0"/>
+          </a:p>
+          <a:p>
+            <a:endParaRPr lang="en-US" dirty="0"/>
+          </a:p>
+        </p:txBody>
+      </p:sp>
+    </p:spTree>
+    <p:extLst>
+      <p:ext uri="{BB962C8B-B14F-4D97-AF65-F5344CB8AC3E}">
+        <p14:creationId xmlns:p14="http://schemas.microsoft.com/office/powerpoint/2010/main" val="715909467"/>
       </p:ext>
     </p:extLst>
   </p:cSld>
@@ -9813,6 +10282,1507 @@
     <p:extLst>
       <p:ext uri="{BB962C8B-B14F-4D97-AF65-F5344CB8AC3E}">
         <p14:creationId xmlns:p14="http://schemas.microsoft.com/office/powerpoint/2010/main" val="2579828691"/>
+      </p:ext>
+    </p:extLst>
+  </p:cSld>
+  <p:clrMapOvr>
+    <a:masterClrMapping/>
+  </p:clrMapOvr>
+</p:sld>
+</file>
+
+<file path=ppt/slides/slide50.xml><?xml version="1.0" encoding="utf-8"?>
+<p:sld xmlns:a="http://schemas.openxmlformats.org/drawingml/2006/main" xmlns:r="http://schemas.openxmlformats.org/officeDocument/2006/relationships" xmlns:p="http://schemas.openxmlformats.org/presentationml/2006/main">
+  <p:cSld>
+    <p:spTree>
+      <p:nvGrpSpPr>
+        <p:cNvPr id="1" name=""/>
+        <p:cNvGrpSpPr/>
+        <p:nvPr/>
+      </p:nvGrpSpPr>
+      <p:grpSpPr>
+        <a:xfrm>
+          <a:off x="0" y="0"/>
+          <a:ext cx="0" cy="0"/>
+          <a:chOff x="0" y="0"/>
+          <a:chExt cx="0" cy="0"/>
+        </a:xfrm>
+      </p:grpSpPr>
+      <p:sp>
+        <p:nvSpPr>
+          <p:cNvPr id="2" name="Title 1">
+            <a:extLst>
+              <a:ext uri="{FF2B5EF4-FFF2-40B4-BE49-F238E27FC236}">
+                <a16:creationId xmlns:a16="http://schemas.microsoft.com/office/drawing/2014/main" id="{C9186D62-AFC6-43DA-3FB0-D27E4D78F55C}"/>
+              </a:ext>
+            </a:extLst>
+          </p:cNvPr>
+          <p:cNvSpPr>
+            <a:spLocks noGrp="1"/>
+          </p:cNvSpPr>
+          <p:nvPr>
+            <p:ph type="title"/>
+          </p:nvPr>
+        </p:nvSpPr>
+        <p:spPr/>
+        <p:txBody>
+          <a:bodyPr/>
+          <a:lstStyle/>
+          <a:p>
+            <a:r>
+              <a:rPr lang="en-US" dirty="0"/>
+              <a:t>Someone has to be in charge</a:t>
+            </a:r>
+          </a:p>
+        </p:txBody>
+      </p:sp>
+      <p:sp>
+        <p:nvSpPr>
+          <p:cNvPr id="3" name="Content Placeholder 2">
+            <a:extLst>
+              <a:ext uri="{FF2B5EF4-FFF2-40B4-BE49-F238E27FC236}">
+                <a16:creationId xmlns:a16="http://schemas.microsoft.com/office/drawing/2014/main" id="{1B36F13D-9BF3-691B-0AAB-C4C6B2ED8903}"/>
+              </a:ext>
+            </a:extLst>
+          </p:cNvPr>
+          <p:cNvSpPr>
+            <a:spLocks noGrp="1"/>
+          </p:cNvSpPr>
+          <p:nvPr>
+            <p:ph idx="1"/>
+          </p:nvPr>
+        </p:nvSpPr>
+        <p:spPr/>
+        <p:txBody>
+          <a:bodyPr/>
+          <a:lstStyle/>
+          <a:p>
+            <a:r>
+              <a:rPr lang="en-US" dirty="0"/>
+              <a:t>Between you, designate someone to be your "manager".</a:t>
+            </a:r>
+          </a:p>
+          <a:p>
+            <a:r>
+              <a:rPr lang="en-US" dirty="0"/>
+              <a:t>Even if you have a direct supervisor, you still have a manager.</a:t>
+            </a:r>
+          </a:p>
+          <a:p>
+            <a:r>
+              <a:rPr lang="en-US" dirty="0"/>
+              <a:t>When I ask you which group you're part of, respond with the name of your ultimate manager.</a:t>
+            </a:r>
+          </a:p>
+          <a:p>
+            <a:pPr lvl="1"/>
+            <a:r>
+              <a:rPr lang="en-US" dirty="0"/>
+              <a:t>This operation is called </a:t>
+            </a:r>
+            <a:r>
+              <a:rPr lang="en-US" b="1" dirty="0"/>
+              <a:t>find()</a:t>
+            </a:r>
+            <a:endParaRPr lang="en-US" dirty="0"/>
+          </a:p>
+          <a:p>
+            <a:endParaRPr lang="en-US" dirty="0"/>
+          </a:p>
+        </p:txBody>
+      </p:sp>
+    </p:spTree>
+    <p:extLst>
+      <p:ext uri="{BB962C8B-B14F-4D97-AF65-F5344CB8AC3E}">
+        <p14:creationId xmlns:p14="http://schemas.microsoft.com/office/powerpoint/2010/main" val="2514122391"/>
+      </p:ext>
+    </p:extLst>
+  </p:cSld>
+  <p:clrMapOvr>
+    <a:masterClrMapping/>
+  </p:clrMapOvr>
+</p:sld>
+</file>
+
+<file path=ppt/slides/slide51.xml><?xml version="1.0" encoding="utf-8"?>
+<p:sld xmlns:a="http://schemas.openxmlformats.org/drawingml/2006/main" xmlns:r="http://schemas.openxmlformats.org/officeDocument/2006/relationships" xmlns:p="http://schemas.openxmlformats.org/presentationml/2006/main">
+  <p:cSld>
+    <p:spTree>
+      <p:nvGrpSpPr>
+        <p:cNvPr id="1" name=""/>
+        <p:cNvGrpSpPr/>
+        <p:nvPr/>
+      </p:nvGrpSpPr>
+      <p:grpSpPr>
+        <a:xfrm>
+          <a:off x="0" y="0"/>
+          <a:ext cx="0" cy="0"/>
+          <a:chOff x="0" y="0"/>
+          <a:chExt cx="0" cy="0"/>
+        </a:xfrm>
+      </p:grpSpPr>
+      <p:sp>
+        <p:nvSpPr>
+          <p:cNvPr id="2" name="Title 1">
+            <a:extLst>
+              <a:ext uri="{FF2B5EF4-FFF2-40B4-BE49-F238E27FC236}">
+                <a16:creationId xmlns:a16="http://schemas.microsoft.com/office/drawing/2014/main" id="{BF5ED4CA-FB4C-2E56-2036-7C248ED5DF39}"/>
+              </a:ext>
+            </a:extLst>
+          </p:cNvPr>
+          <p:cNvSpPr>
+            <a:spLocks noGrp="1"/>
+          </p:cNvSpPr>
+          <p:nvPr>
+            <p:ph type="title"/>
+          </p:nvPr>
+        </p:nvSpPr>
+        <p:spPr/>
+        <p:txBody>
+          <a:bodyPr/>
+          <a:lstStyle/>
+          <a:p>
+            <a:r>
+              <a:rPr lang="en-US" dirty="0"/>
+              <a:t>Merging Departments</a:t>
+            </a:r>
+          </a:p>
+        </p:txBody>
+      </p:sp>
+      <p:sp>
+        <p:nvSpPr>
+          <p:cNvPr id="3" name="Content Placeholder 2">
+            <a:extLst>
+              <a:ext uri="{FF2B5EF4-FFF2-40B4-BE49-F238E27FC236}">
+                <a16:creationId xmlns:a16="http://schemas.microsoft.com/office/drawing/2014/main" id="{F5AE3880-076F-4A8B-259D-8DC94391BCFE}"/>
+              </a:ext>
+            </a:extLst>
+          </p:cNvPr>
+          <p:cNvSpPr>
+            <a:spLocks noGrp="1"/>
+          </p:cNvSpPr>
+          <p:nvPr>
+            <p:ph idx="1"/>
+          </p:nvPr>
+        </p:nvSpPr>
+        <p:spPr/>
+        <p:txBody>
+          <a:bodyPr/>
+          <a:lstStyle/>
+          <a:p>
+            <a:r>
+              <a:rPr lang="en-US" dirty="0"/>
+              <a:t>Merging 2 departments: </a:t>
+            </a:r>
+          </a:p>
+          <a:p>
+            <a:pPr lvl="1"/>
+            <a:r>
+              <a:rPr lang="en-US" dirty="0"/>
+              <a:t>One of the two existing managers gets to be ultimate manager</a:t>
+            </a:r>
+          </a:p>
+          <a:p>
+            <a:pPr lvl="1"/>
+            <a:r>
+              <a:rPr lang="en-US" dirty="0"/>
+              <a:t>Can't have 2 managers</a:t>
+            </a:r>
+          </a:p>
+          <a:p>
+            <a:pPr lvl="1"/>
+            <a:r>
+              <a:rPr lang="en-US" dirty="0"/>
+              <a:t>The result is 1 department with 1 manager.</a:t>
+            </a:r>
+          </a:p>
+          <a:p>
+            <a:pPr lvl="1"/>
+            <a:endParaRPr lang="en-US" dirty="0"/>
+          </a:p>
+          <a:p>
+            <a:r>
+              <a:rPr lang="en-US" dirty="0"/>
+              <a:t>This operation is called </a:t>
+            </a:r>
+            <a:r>
+              <a:rPr lang="en-US" b="1" dirty="0"/>
+              <a:t>union().</a:t>
+            </a:r>
+          </a:p>
+          <a:p>
+            <a:r>
+              <a:rPr lang="en-US" dirty="0"/>
+              <a:t>Specifically, </a:t>
+            </a:r>
+          </a:p>
+          <a:p>
+            <a:pPr lvl="1"/>
+            <a:endParaRPr lang="en-US" dirty="0"/>
+          </a:p>
+        </p:txBody>
+      </p:sp>
+    </p:spTree>
+    <p:extLst>
+      <p:ext uri="{BB962C8B-B14F-4D97-AF65-F5344CB8AC3E}">
+        <p14:creationId xmlns:p14="http://schemas.microsoft.com/office/powerpoint/2010/main" val="59510881"/>
+      </p:ext>
+    </p:extLst>
+  </p:cSld>
+  <p:clrMapOvr>
+    <a:masterClrMapping/>
+  </p:clrMapOvr>
+</p:sld>
+</file>
+
+<file path=ppt/slides/slide52.xml><?xml version="1.0" encoding="utf-8"?>
+<p:sld xmlns:a="http://schemas.openxmlformats.org/drawingml/2006/main" xmlns:r="http://schemas.openxmlformats.org/officeDocument/2006/relationships" xmlns:p="http://schemas.openxmlformats.org/presentationml/2006/main">
+  <p:cSld>
+    <p:spTree>
+      <p:nvGrpSpPr>
+        <p:cNvPr id="1" name=""/>
+        <p:cNvGrpSpPr/>
+        <p:nvPr/>
+      </p:nvGrpSpPr>
+      <p:grpSpPr>
+        <a:xfrm>
+          <a:off x="0" y="0"/>
+          <a:ext cx="0" cy="0"/>
+          <a:chOff x="0" y="0"/>
+          <a:chExt cx="0" cy="0"/>
+        </a:xfrm>
+      </p:grpSpPr>
+      <p:sp>
+        <p:nvSpPr>
+          <p:cNvPr id="2" name="Title 1">
+            <a:extLst>
+              <a:ext uri="{FF2B5EF4-FFF2-40B4-BE49-F238E27FC236}">
+                <a16:creationId xmlns:a16="http://schemas.microsoft.com/office/drawing/2014/main" id="{F320FE24-4E66-3CBD-59DD-15C98CC82C41}"/>
+              </a:ext>
+            </a:extLst>
+          </p:cNvPr>
+          <p:cNvSpPr>
+            <a:spLocks noGrp="1"/>
+          </p:cNvSpPr>
+          <p:nvPr>
+            <p:ph type="title"/>
+          </p:nvPr>
+        </p:nvSpPr>
+        <p:spPr/>
+        <p:txBody>
+          <a:bodyPr/>
+          <a:lstStyle/>
+          <a:p>
+            <a:r>
+              <a:rPr lang="en-US" dirty="0"/>
+              <a:t>Union-Find / Disjoint Sets</a:t>
+            </a:r>
+          </a:p>
+        </p:txBody>
+      </p:sp>
+      <p:sp>
+        <p:nvSpPr>
+          <p:cNvPr id="3" name="Content Placeholder 2">
+            <a:extLst>
+              <a:ext uri="{FF2B5EF4-FFF2-40B4-BE49-F238E27FC236}">
+                <a16:creationId xmlns:a16="http://schemas.microsoft.com/office/drawing/2014/main" id="{4397C985-C8B4-A290-0088-45590190B06B}"/>
+              </a:ext>
+            </a:extLst>
+          </p:cNvPr>
+          <p:cNvSpPr>
+            <a:spLocks noGrp="1"/>
+          </p:cNvSpPr>
+          <p:nvPr>
+            <p:ph idx="1"/>
+          </p:nvPr>
+        </p:nvSpPr>
+        <p:spPr/>
+        <p:txBody>
+          <a:bodyPr/>
+          <a:lstStyle/>
+          <a:p>
+            <a:r>
+              <a:rPr lang="en-US" dirty="0"/>
+              <a:t>A data structure that performs 2 main operations:</a:t>
+            </a:r>
+          </a:p>
+          <a:p>
+            <a:pPr lvl="1"/>
+            <a:r>
+              <a:rPr lang="en-US" dirty="0"/>
+              <a:t>Union(</a:t>
+            </a:r>
+            <a:r>
+              <a:rPr lang="en-US" dirty="0" err="1"/>
+              <a:t>x,y</a:t>
+            </a:r>
+            <a:r>
+              <a:rPr lang="en-US" dirty="0"/>
+              <a:t>)</a:t>
+            </a:r>
+          </a:p>
+          <a:p>
+            <a:pPr lvl="2"/>
+            <a:r>
+              <a:rPr lang="en-US" dirty="0"/>
+              <a:t>Combine two departments based on any two people in those departments.</a:t>
+            </a:r>
+          </a:p>
+          <a:p>
+            <a:pPr lvl="1"/>
+            <a:r>
+              <a:rPr lang="en-US" dirty="0"/>
+              <a:t>Find(x)</a:t>
+            </a:r>
+          </a:p>
+          <a:p>
+            <a:pPr lvl="2"/>
+            <a:r>
+              <a:rPr lang="en-US" dirty="0"/>
+              <a:t>Return who x's ultimate manager is.</a:t>
+            </a:r>
+          </a:p>
+        </p:txBody>
+      </p:sp>
+    </p:spTree>
+    <p:extLst>
+      <p:ext uri="{BB962C8B-B14F-4D97-AF65-F5344CB8AC3E}">
+        <p14:creationId xmlns:p14="http://schemas.microsoft.com/office/powerpoint/2010/main" val="2979300879"/>
+      </p:ext>
+    </p:extLst>
+  </p:cSld>
+  <p:clrMapOvr>
+    <a:masterClrMapping/>
+  </p:clrMapOvr>
+</p:sld>
+</file>
+
+<file path=ppt/slides/slide53.xml><?xml version="1.0" encoding="utf-8"?>
+<p:sld xmlns:a="http://schemas.openxmlformats.org/drawingml/2006/main" xmlns:r="http://schemas.openxmlformats.org/officeDocument/2006/relationships" xmlns:p="http://schemas.openxmlformats.org/presentationml/2006/main">
+  <p:cSld>
+    <p:spTree>
+      <p:nvGrpSpPr>
+        <p:cNvPr id="1" name=""/>
+        <p:cNvGrpSpPr/>
+        <p:nvPr/>
+      </p:nvGrpSpPr>
+      <p:grpSpPr>
+        <a:xfrm>
+          <a:off x="0" y="0"/>
+          <a:ext cx="0" cy="0"/>
+          <a:chOff x="0" y="0"/>
+          <a:chExt cx="0" cy="0"/>
+        </a:xfrm>
+      </p:grpSpPr>
+      <p:sp>
+        <p:nvSpPr>
+          <p:cNvPr id="2" name="Title 1">
+            <a:extLst>
+              <a:ext uri="{FF2B5EF4-FFF2-40B4-BE49-F238E27FC236}">
+                <a16:creationId xmlns:a16="http://schemas.microsoft.com/office/drawing/2014/main" id="{4078CEC8-4844-33C1-C568-128063ECC00C}"/>
+              </a:ext>
+            </a:extLst>
+          </p:cNvPr>
+          <p:cNvSpPr>
+            <a:spLocks noGrp="1"/>
+          </p:cNvSpPr>
+          <p:nvPr>
+            <p:ph type="title"/>
+          </p:nvPr>
+        </p:nvSpPr>
+        <p:spPr/>
+        <p:txBody>
+          <a:bodyPr/>
+          <a:lstStyle/>
+          <a:p>
+            <a:r>
+              <a:rPr lang="en-US" dirty="0"/>
+              <a:t>Union-Find uses a Forest</a:t>
+            </a:r>
+          </a:p>
+        </p:txBody>
+      </p:sp>
+      <p:sp>
+        <p:nvSpPr>
+          <p:cNvPr id="3" name="Content Placeholder 2">
+            <a:extLst>
+              <a:ext uri="{FF2B5EF4-FFF2-40B4-BE49-F238E27FC236}">
+                <a16:creationId xmlns:a16="http://schemas.microsoft.com/office/drawing/2014/main" id="{2C45170F-75F7-9170-B30D-5200D7D7F634}"/>
+              </a:ext>
+            </a:extLst>
+          </p:cNvPr>
+          <p:cNvSpPr>
+            <a:spLocks noGrp="1"/>
+          </p:cNvSpPr>
+          <p:nvPr>
+            <p:ph idx="1"/>
+          </p:nvPr>
+        </p:nvSpPr>
+        <p:spPr/>
+        <p:txBody>
+          <a:bodyPr/>
+          <a:lstStyle/>
+          <a:p>
+            <a:r>
+              <a:rPr lang="en-US" dirty="0"/>
+              <a:t>Forest = group of un-connected trees</a:t>
+            </a:r>
+          </a:p>
+          <a:p>
+            <a:r>
+              <a:rPr lang="en-US" dirty="0"/>
+              <a:t>Each tree in the forest is a connected group </a:t>
+            </a:r>
+          </a:p>
+          <a:p>
+            <a:pPr lvl="1"/>
+            <a:r>
+              <a:rPr lang="en-US" dirty="0"/>
+              <a:t>A department, identified by its ultimate manager</a:t>
+            </a:r>
+          </a:p>
+          <a:p>
+            <a:r>
+              <a:rPr lang="en-US" dirty="0"/>
+              <a:t>Merging departments means combining trees under a common root</a:t>
+            </a:r>
+          </a:p>
+        </p:txBody>
+      </p:sp>
+    </p:spTree>
+    <p:extLst>
+      <p:ext uri="{BB962C8B-B14F-4D97-AF65-F5344CB8AC3E}">
+        <p14:creationId xmlns:p14="http://schemas.microsoft.com/office/powerpoint/2010/main" val="3646803723"/>
+      </p:ext>
+    </p:extLst>
+  </p:cSld>
+  <p:clrMapOvr>
+    <a:masterClrMapping/>
+  </p:clrMapOvr>
+</p:sld>
+</file>
+
+<file path=ppt/slides/slide54.xml><?xml version="1.0" encoding="utf-8"?>
+<p:sld xmlns:a="http://schemas.openxmlformats.org/drawingml/2006/main" xmlns:r="http://schemas.openxmlformats.org/officeDocument/2006/relationships" xmlns:p="http://schemas.openxmlformats.org/presentationml/2006/main">
+  <p:cSld>
+    <p:spTree>
+      <p:nvGrpSpPr>
+        <p:cNvPr id="1" name=""/>
+        <p:cNvGrpSpPr/>
+        <p:nvPr/>
+      </p:nvGrpSpPr>
+      <p:grpSpPr>
+        <a:xfrm>
+          <a:off x="0" y="0"/>
+          <a:ext cx="0" cy="0"/>
+          <a:chOff x="0" y="0"/>
+          <a:chExt cx="0" cy="0"/>
+        </a:xfrm>
+      </p:grpSpPr>
+      <p:sp>
+        <p:nvSpPr>
+          <p:cNvPr id="2" name="Title 1">
+            <a:extLst>
+              <a:ext uri="{FF2B5EF4-FFF2-40B4-BE49-F238E27FC236}">
+                <a16:creationId xmlns:a16="http://schemas.microsoft.com/office/drawing/2014/main" id="{6B6FB906-D78B-706E-3DE7-53AC4800B2D0}"/>
+              </a:ext>
+            </a:extLst>
+          </p:cNvPr>
+          <p:cNvSpPr>
+            <a:spLocks noGrp="1"/>
+          </p:cNvSpPr>
+          <p:nvPr>
+            <p:ph type="title"/>
+          </p:nvPr>
+        </p:nvSpPr>
+        <p:spPr/>
+        <p:txBody>
+          <a:bodyPr/>
+          <a:lstStyle/>
+          <a:p>
+            <a:r>
+              <a:rPr lang="en-US" dirty="0"/>
+              <a:t>Union Find: that's great, but how does it code???</a:t>
+            </a:r>
+          </a:p>
+        </p:txBody>
+      </p:sp>
+      <p:sp>
+        <p:nvSpPr>
+          <p:cNvPr id="3" name="Content Placeholder 2">
+            <a:extLst>
+              <a:ext uri="{FF2B5EF4-FFF2-40B4-BE49-F238E27FC236}">
+                <a16:creationId xmlns:a16="http://schemas.microsoft.com/office/drawing/2014/main" id="{292B1E09-BBA7-D6DE-E9A7-DB790D1893A7}"/>
+              </a:ext>
+            </a:extLst>
+          </p:cNvPr>
+          <p:cNvSpPr>
+            <a:spLocks noGrp="1"/>
+          </p:cNvSpPr>
+          <p:nvPr>
+            <p:ph idx="1"/>
+          </p:nvPr>
+        </p:nvSpPr>
+        <p:spPr/>
+        <p:txBody>
+          <a:bodyPr/>
+          <a:lstStyle/>
+          <a:p>
+            <a:r>
+              <a:rPr lang="en-US" dirty="0"/>
+              <a:t>Remind me: What's an element of an array? </a:t>
+            </a:r>
+          </a:p>
+          <a:p>
+            <a:endParaRPr lang="en-US" dirty="0"/>
+          </a:p>
+          <a:p>
+            <a:r>
+              <a:rPr lang="en-US" dirty="0"/>
+              <a:t>Remind me: What's an index of an array?</a:t>
+            </a:r>
+          </a:p>
+        </p:txBody>
+      </p:sp>
+    </p:spTree>
+    <p:extLst>
+      <p:ext uri="{BB962C8B-B14F-4D97-AF65-F5344CB8AC3E}">
+        <p14:creationId xmlns:p14="http://schemas.microsoft.com/office/powerpoint/2010/main" val="3296987055"/>
+      </p:ext>
+    </p:extLst>
+  </p:cSld>
+  <p:clrMapOvr>
+    <a:masterClrMapping/>
+  </p:clrMapOvr>
+</p:sld>
+</file>
+
+<file path=ppt/slides/slide55.xml><?xml version="1.0" encoding="utf-8"?>
+<p:sld xmlns:a="http://schemas.openxmlformats.org/drawingml/2006/main" xmlns:r="http://schemas.openxmlformats.org/officeDocument/2006/relationships" xmlns:p="http://schemas.openxmlformats.org/presentationml/2006/main">
+  <p:cSld>
+    <p:spTree>
+      <p:nvGrpSpPr>
+        <p:cNvPr id="1" name="">
+          <a:extLst>
+            <a:ext uri="{FF2B5EF4-FFF2-40B4-BE49-F238E27FC236}">
+              <a16:creationId xmlns:a16="http://schemas.microsoft.com/office/drawing/2014/main" id="{4946260D-3472-FE6A-B918-EA7CD59DA9DC}"/>
+            </a:ext>
+          </a:extLst>
+        </p:cNvPr>
+        <p:cNvGrpSpPr/>
+        <p:nvPr/>
+      </p:nvGrpSpPr>
+      <p:grpSpPr>
+        <a:xfrm>
+          <a:off x="0" y="0"/>
+          <a:ext cx="0" cy="0"/>
+          <a:chOff x="0" y="0"/>
+          <a:chExt cx="0" cy="0"/>
+        </a:xfrm>
+      </p:grpSpPr>
+      <p:sp>
+        <p:nvSpPr>
+          <p:cNvPr id="2" name="Title 1">
+            <a:extLst>
+              <a:ext uri="{FF2B5EF4-FFF2-40B4-BE49-F238E27FC236}">
+                <a16:creationId xmlns:a16="http://schemas.microsoft.com/office/drawing/2014/main" id="{974FA4CC-14B6-FD4F-547F-2D124D07A197}"/>
+              </a:ext>
+            </a:extLst>
+          </p:cNvPr>
+          <p:cNvSpPr>
+            <a:spLocks noGrp="1"/>
+          </p:cNvSpPr>
+          <p:nvPr>
+            <p:ph type="title"/>
+          </p:nvPr>
+        </p:nvSpPr>
+        <p:spPr/>
+        <p:txBody>
+          <a:bodyPr/>
+          <a:lstStyle/>
+          <a:p>
+            <a:r>
+              <a:rPr lang="en-US" dirty="0"/>
+              <a:t>Union Find: that's great, but how does it code???</a:t>
+            </a:r>
+          </a:p>
+        </p:txBody>
+      </p:sp>
+      <p:sp>
+        <p:nvSpPr>
+          <p:cNvPr id="3" name="Content Placeholder 2">
+            <a:extLst>
+              <a:ext uri="{FF2B5EF4-FFF2-40B4-BE49-F238E27FC236}">
+                <a16:creationId xmlns:a16="http://schemas.microsoft.com/office/drawing/2014/main" id="{26E2FD14-1B99-829E-5DE6-6F4EE95EBBA8}"/>
+              </a:ext>
+            </a:extLst>
+          </p:cNvPr>
+          <p:cNvSpPr>
+            <a:spLocks noGrp="1"/>
+          </p:cNvSpPr>
+          <p:nvPr>
+            <p:ph idx="1"/>
+          </p:nvPr>
+        </p:nvSpPr>
+        <p:spPr/>
+        <p:txBody>
+          <a:bodyPr/>
+          <a:lstStyle/>
+          <a:p>
+            <a:r>
+              <a:rPr lang="en-US" dirty="0"/>
+              <a:t>Each </a:t>
+            </a:r>
+            <a:r>
+              <a:rPr lang="en-US" i="1" dirty="0"/>
+              <a:t>element</a:t>
+            </a:r>
+            <a:r>
+              <a:rPr lang="en-US" dirty="0"/>
+              <a:t> corresponds to an array </a:t>
+            </a:r>
+            <a:r>
+              <a:rPr lang="en-US" i="1" u="sng" dirty="0"/>
+              <a:t>index</a:t>
+            </a:r>
+            <a:r>
+              <a:rPr lang="en-US" dirty="0"/>
+              <a:t>.</a:t>
+            </a:r>
+          </a:p>
+          <a:p>
+            <a:pPr lvl="1"/>
+            <a:r>
+              <a:rPr lang="en-US" dirty="0"/>
+              <a:t>Space: O(n)</a:t>
+            </a:r>
+          </a:p>
+          <a:p>
+            <a:r>
+              <a:rPr lang="en-US" dirty="0"/>
+              <a:t>Elements not nice integers? </a:t>
+            </a:r>
+          </a:p>
+          <a:p>
+            <a:pPr lvl="1"/>
+            <a:r>
+              <a:rPr lang="en-US" dirty="0"/>
+              <a:t>Use a </a:t>
+            </a:r>
+            <a:r>
+              <a:rPr lang="en-US" dirty="0" err="1"/>
+              <a:t>Hashmap</a:t>
+            </a:r>
+            <a:r>
+              <a:rPr lang="en-US" dirty="0"/>
+              <a:t>/dictionary. Map elements to integers. </a:t>
+            </a:r>
+          </a:p>
+          <a:p>
+            <a:r>
+              <a:rPr lang="en-US" dirty="0"/>
+              <a:t>The </a:t>
+            </a:r>
+            <a:r>
+              <a:rPr lang="en-US" i="1" u="sng" dirty="0"/>
+              <a:t>item</a:t>
+            </a:r>
+            <a:r>
+              <a:rPr lang="en-US" dirty="0"/>
+              <a:t> at each element is the name of the "manager"</a:t>
+            </a:r>
+          </a:p>
+          <a:p>
+            <a:pPr lvl="1"/>
+            <a:r>
+              <a:rPr lang="en-US" dirty="0"/>
+              <a:t>If 5's root is 2, the element at index 5 is 2</a:t>
+            </a:r>
+          </a:p>
+        </p:txBody>
+      </p:sp>
+    </p:spTree>
+    <p:extLst>
+      <p:ext uri="{BB962C8B-B14F-4D97-AF65-F5344CB8AC3E}">
+        <p14:creationId xmlns:p14="http://schemas.microsoft.com/office/powerpoint/2010/main" val="2368205554"/>
+      </p:ext>
+    </p:extLst>
+  </p:cSld>
+  <p:clrMapOvr>
+    <a:masterClrMapping/>
+  </p:clrMapOvr>
+</p:sld>
+</file>
+
+<file path=ppt/slides/slide56.xml><?xml version="1.0" encoding="utf-8"?>
+<p:sld xmlns:a="http://schemas.openxmlformats.org/drawingml/2006/main" xmlns:r="http://schemas.openxmlformats.org/officeDocument/2006/relationships" xmlns:p="http://schemas.openxmlformats.org/presentationml/2006/main">
+  <p:cSld>
+    <p:spTree>
+      <p:nvGrpSpPr>
+        <p:cNvPr id="1" name=""/>
+        <p:cNvGrpSpPr/>
+        <p:nvPr/>
+      </p:nvGrpSpPr>
+      <p:grpSpPr>
+        <a:xfrm>
+          <a:off x="0" y="0"/>
+          <a:ext cx="0" cy="0"/>
+          <a:chOff x="0" y="0"/>
+          <a:chExt cx="0" cy="0"/>
+        </a:xfrm>
+      </p:grpSpPr>
+      <p:sp>
+        <p:nvSpPr>
+          <p:cNvPr id="2" name="Title 1">
+            <a:extLst>
+              <a:ext uri="{FF2B5EF4-FFF2-40B4-BE49-F238E27FC236}">
+                <a16:creationId xmlns:a16="http://schemas.microsoft.com/office/drawing/2014/main" id="{F3D254C8-1D77-885D-37F5-39A912F40A92}"/>
+              </a:ext>
+            </a:extLst>
+          </p:cNvPr>
+          <p:cNvSpPr>
+            <a:spLocks noGrp="1"/>
+          </p:cNvSpPr>
+          <p:nvPr>
+            <p:ph type="title"/>
+          </p:nvPr>
+        </p:nvSpPr>
+        <p:spPr>
+          <a:xfrm rot="16200000">
+            <a:off x="-4661509" y="256381"/>
+            <a:ext cx="10515600" cy="1325563"/>
+          </a:xfrm>
+        </p:spPr>
+        <p:txBody>
+          <a:bodyPr/>
+          <a:lstStyle/>
+          <a:p>
+            <a:r>
+              <a:rPr lang="en-US" dirty="0"/>
+              <a:t>Code</a:t>
+            </a:r>
+          </a:p>
+        </p:txBody>
+      </p:sp>
+      <p:sp>
+        <p:nvSpPr>
+          <p:cNvPr id="3" name="Content Placeholder 2">
+            <a:extLst>
+              <a:ext uri="{FF2B5EF4-FFF2-40B4-BE49-F238E27FC236}">
+                <a16:creationId xmlns:a16="http://schemas.microsoft.com/office/drawing/2014/main" id="{151A86E7-78A9-EDFC-414F-40F6E8097CC6}"/>
+              </a:ext>
+            </a:extLst>
+          </p:cNvPr>
+          <p:cNvSpPr>
+            <a:spLocks noGrp="1"/>
+          </p:cNvSpPr>
+          <p:nvPr>
+            <p:ph idx="1"/>
+          </p:nvPr>
+        </p:nvSpPr>
+        <p:spPr/>
+        <p:txBody>
+          <a:bodyPr/>
+          <a:lstStyle/>
+          <a:p>
+            <a:endParaRPr lang="en-US"/>
+          </a:p>
+        </p:txBody>
+      </p:sp>
+      <p:pic>
+        <p:nvPicPr>
+          <p:cNvPr id="4" name="Picture 3" descr="A computer screen shot of a program code&#10;&#10;AI-generated content may be incorrect.">
+            <a:extLst>
+              <a:ext uri="{FF2B5EF4-FFF2-40B4-BE49-F238E27FC236}">
+                <a16:creationId xmlns:a16="http://schemas.microsoft.com/office/drawing/2014/main" id="{77471036-EF04-0202-39CB-2C8FB879492A}"/>
+              </a:ext>
+            </a:extLst>
+          </p:cNvPr>
+          <p:cNvPicPr>
+            <a:picLocks noChangeAspect="1"/>
+          </p:cNvPicPr>
+          <p:nvPr/>
+        </p:nvPicPr>
+        <p:blipFill>
+          <a:blip r:embed="rId2"/>
+          <a:srcRect l="10569" t="7714" r="4499" b="17108"/>
+          <a:stretch>
+            <a:fillRect/>
+          </a:stretch>
+        </p:blipFill>
+        <p:spPr>
+          <a:xfrm>
+            <a:off x="838200" y="183458"/>
+            <a:ext cx="11065590" cy="6121752"/>
+          </a:xfrm>
+          <a:prstGeom prst="rect">
+            <a:avLst/>
+          </a:prstGeom>
+        </p:spPr>
+      </p:pic>
+      <p:sp>
+        <p:nvSpPr>
+          <p:cNvPr id="5" name="TextBox 4">
+            <a:extLst>
+              <a:ext uri="{FF2B5EF4-FFF2-40B4-BE49-F238E27FC236}">
+                <a16:creationId xmlns:a16="http://schemas.microsoft.com/office/drawing/2014/main" id="{C9F73690-A300-B9AD-F2E2-268E58D1F1C9}"/>
+              </a:ext>
+            </a:extLst>
+          </p:cNvPr>
+          <p:cNvSpPr txBox="1"/>
+          <p:nvPr/>
+        </p:nvSpPr>
+        <p:spPr>
+          <a:xfrm>
+            <a:off x="1077686" y="6433457"/>
+            <a:ext cx="5704318" cy="369332"/>
+          </a:xfrm>
+          <a:prstGeom prst="rect">
+            <a:avLst/>
+          </a:prstGeom>
+          <a:noFill/>
+        </p:spPr>
+        <p:txBody>
+          <a:bodyPr wrap="none" rtlCol="0">
+            <a:spAutoFit/>
+          </a:bodyPr>
+          <a:lstStyle/>
+          <a:p>
+            <a:r>
+              <a:rPr lang="en-US" dirty="0"/>
+              <a:t>From </a:t>
+            </a:r>
+            <a:r>
+              <a:rPr lang="en-US" dirty="0">
+                <a:hlinkClick r:id="rId3"/>
+              </a:rPr>
+              <a:t>https://www.youtube.com/watch?v=92UpvDXc8fs</a:t>
+            </a:r>
+            <a:r>
+              <a:rPr lang="en-US" dirty="0"/>
+              <a:t> </a:t>
+            </a:r>
+          </a:p>
+        </p:txBody>
+      </p:sp>
+    </p:spTree>
+    <p:extLst>
+      <p:ext uri="{BB962C8B-B14F-4D97-AF65-F5344CB8AC3E}">
+        <p14:creationId xmlns:p14="http://schemas.microsoft.com/office/powerpoint/2010/main" val="3352725270"/>
+      </p:ext>
+    </p:extLst>
+  </p:cSld>
+  <p:clrMapOvr>
+    <a:masterClrMapping/>
+  </p:clrMapOvr>
+</p:sld>
+</file>
+
+<file path=ppt/slides/slide57.xml><?xml version="1.0" encoding="utf-8"?>
+<p:sld xmlns:a="http://schemas.openxmlformats.org/drawingml/2006/main" xmlns:r="http://schemas.openxmlformats.org/officeDocument/2006/relationships" xmlns:p="http://schemas.openxmlformats.org/presentationml/2006/main">
+  <p:cSld>
+    <p:spTree>
+      <p:nvGrpSpPr>
+        <p:cNvPr id="1" name=""/>
+        <p:cNvGrpSpPr/>
+        <p:nvPr/>
+      </p:nvGrpSpPr>
+      <p:grpSpPr>
+        <a:xfrm>
+          <a:off x="0" y="0"/>
+          <a:ext cx="0" cy="0"/>
+          <a:chOff x="0" y="0"/>
+          <a:chExt cx="0" cy="0"/>
+        </a:xfrm>
+      </p:grpSpPr>
+      <p:sp>
+        <p:nvSpPr>
+          <p:cNvPr id="2" name="Title 1">
+            <a:extLst>
+              <a:ext uri="{FF2B5EF4-FFF2-40B4-BE49-F238E27FC236}">
+                <a16:creationId xmlns:a16="http://schemas.microsoft.com/office/drawing/2014/main" id="{E6E390FE-2DD7-228E-7921-9C4707FA86EB}"/>
+              </a:ext>
+            </a:extLst>
+          </p:cNvPr>
+          <p:cNvSpPr>
+            <a:spLocks noGrp="1"/>
+          </p:cNvSpPr>
+          <p:nvPr>
+            <p:ph type="title"/>
+          </p:nvPr>
+        </p:nvSpPr>
+        <p:spPr/>
+        <p:txBody>
+          <a:bodyPr/>
+          <a:lstStyle/>
+          <a:p>
+            <a:r>
+              <a:rPr lang="en-US" dirty="0"/>
+              <a:t>Example: with 10-element array</a:t>
+            </a:r>
+          </a:p>
+        </p:txBody>
+      </p:sp>
+      <p:sp>
+        <p:nvSpPr>
+          <p:cNvPr id="3" name="Content Placeholder 2">
+            <a:extLst>
+              <a:ext uri="{FF2B5EF4-FFF2-40B4-BE49-F238E27FC236}">
+                <a16:creationId xmlns:a16="http://schemas.microsoft.com/office/drawing/2014/main" id="{C127D930-2A0C-ACF4-396C-1042C312E10D}"/>
+              </a:ext>
+            </a:extLst>
+          </p:cNvPr>
+          <p:cNvSpPr>
+            <a:spLocks noGrp="1"/>
+          </p:cNvSpPr>
+          <p:nvPr>
+            <p:ph idx="1"/>
+          </p:nvPr>
+        </p:nvSpPr>
+        <p:spPr>
+          <a:xfrm>
+            <a:off x="838200" y="1511221"/>
+            <a:ext cx="10515600" cy="4665742"/>
+          </a:xfrm>
+        </p:spPr>
+        <p:txBody>
+          <a:bodyPr>
+            <a:normAutofit fontScale="85000" lnSpcReduction="20000"/>
+          </a:bodyPr>
+          <a:lstStyle/>
+          <a:p>
+            <a:r>
+              <a:rPr lang="en-US" dirty="0"/>
+              <a:t>Break ties with a preference for smaller numbers.</a:t>
+            </a:r>
+          </a:p>
+          <a:p>
+            <a:r>
+              <a:rPr lang="en-US" dirty="0"/>
+              <a:t>Union(5, 9)</a:t>
+            </a:r>
+          </a:p>
+          <a:p>
+            <a:r>
+              <a:rPr lang="en-US" dirty="0"/>
+              <a:t>Union( 3,   1)</a:t>
+            </a:r>
+          </a:p>
+          <a:p>
+            <a:r>
+              <a:rPr lang="en-US" dirty="0"/>
+              <a:t>Union( 8,   6)</a:t>
+            </a:r>
+          </a:p>
+          <a:p>
+            <a:r>
+              <a:rPr lang="en-US" dirty="0"/>
+              <a:t>Union( 9,   2)</a:t>
+            </a:r>
+          </a:p>
+          <a:p>
+            <a:r>
+              <a:rPr lang="en-US" dirty="0"/>
+              <a:t>Union( 4,   7)</a:t>
+            </a:r>
+          </a:p>
+          <a:p>
+            <a:r>
+              <a:rPr lang="en-US" dirty="0"/>
+              <a:t>Union(8,  0)</a:t>
+            </a:r>
+          </a:p>
+          <a:p>
+            <a:r>
+              <a:rPr lang="en-US" dirty="0"/>
+              <a:t>Union( 7,   1)</a:t>
+            </a:r>
+          </a:p>
+          <a:p>
+            <a:r>
+              <a:rPr lang="en-US" dirty="0"/>
+              <a:t>Union( 9,   4)</a:t>
+            </a:r>
+          </a:p>
+          <a:p>
+            <a:r>
+              <a:rPr lang="en-US" dirty="0"/>
+              <a:t>Union( 2,   3)</a:t>
+            </a:r>
+          </a:p>
+          <a:p>
+            <a:r>
+              <a:rPr lang="en-US" dirty="0"/>
+              <a:t>Union( 6,   5)</a:t>
+            </a:r>
+          </a:p>
+          <a:p>
+            <a:r>
+              <a:rPr lang="en-US" dirty="0"/>
+              <a:t>What is find(5)?</a:t>
+            </a:r>
+          </a:p>
+        </p:txBody>
+      </p:sp>
+      <p:graphicFrame>
+        <p:nvGraphicFramePr>
+          <p:cNvPr id="4" name="Table 3">
+            <a:extLst>
+              <a:ext uri="{FF2B5EF4-FFF2-40B4-BE49-F238E27FC236}">
+                <a16:creationId xmlns:a16="http://schemas.microsoft.com/office/drawing/2014/main" id="{A3088F4C-DE1A-D937-21A1-00FAFB2B3CBF}"/>
+              </a:ext>
+            </a:extLst>
+          </p:cNvPr>
+          <p:cNvGraphicFramePr>
+            <a:graphicFrameLocks noGrp="1"/>
+          </p:cNvGraphicFramePr>
+          <p:nvPr>
+            <p:extLst>
+              <p:ext uri="{D42A27DB-BD31-4B8C-83A1-F6EECF244321}">
+                <p14:modId xmlns:p14="http://schemas.microsoft.com/office/powerpoint/2010/main" val="2678797254"/>
+              </p:ext>
+            </p:extLst>
+          </p:nvPr>
+        </p:nvGraphicFramePr>
+        <p:xfrm>
+          <a:off x="2032000" y="6176963"/>
+          <a:ext cx="8128000" cy="370840"/>
+        </p:xfrm>
+        <a:graphic>
+          <a:graphicData uri="http://schemas.openxmlformats.org/drawingml/2006/table">
+            <a:tbl>
+              <a:tblPr firstRow="1" bandRow="1">
+                <a:tableStyleId>{5940675A-B579-460E-94D1-54222C63F5DA}</a:tableStyleId>
+              </a:tblPr>
+              <a:tblGrid>
+                <a:gridCol w="812800">
+                  <a:extLst>
+                    <a:ext uri="{9D8B030D-6E8A-4147-A177-3AD203B41FA5}">
+                      <a16:colId xmlns:a16="http://schemas.microsoft.com/office/drawing/2014/main" val="1151278426"/>
+                    </a:ext>
+                  </a:extLst>
+                </a:gridCol>
+                <a:gridCol w="812800">
+                  <a:extLst>
+                    <a:ext uri="{9D8B030D-6E8A-4147-A177-3AD203B41FA5}">
+                      <a16:colId xmlns:a16="http://schemas.microsoft.com/office/drawing/2014/main" val="1106652134"/>
+                    </a:ext>
+                  </a:extLst>
+                </a:gridCol>
+                <a:gridCol w="812800">
+                  <a:extLst>
+                    <a:ext uri="{9D8B030D-6E8A-4147-A177-3AD203B41FA5}">
+                      <a16:colId xmlns:a16="http://schemas.microsoft.com/office/drawing/2014/main" val="879469441"/>
+                    </a:ext>
+                  </a:extLst>
+                </a:gridCol>
+                <a:gridCol w="812800">
+                  <a:extLst>
+                    <a:ext uri="{9D8B030D-6E8A-4147-A177-3AD203B41FA5}">
+                      <a16:colId xmlns:a16="http://schemas.microsoft.com/office/drawing/2014/main" val="1765986356"/>
+                    </a:ext>
+                  </a:extLst>
+                </a:gridCol>
+                <a:gridCol w="812800">
+                  <a:extLst>
+                    <a:ext uri="{9D8B030D-6E8A-4147-A177-3AD203B41FA5}">
+                      <a16:colId xmlns:a16="http://schemas.microsoft.com/office/drawing/2014/main" val="1103893169"/>
+                    </a:ext>
+                  </a:extLst>
+                </a:gridCol>
+                <a:gridCol w="812800">
+                  <a:extLst>
+                    <a:ext uri="{9D8B030D-6E8A-4147-A177-3AD203B41FA5}">
+                      <a16:colId xmlns:a16="http://schemas.microsoft.com/office/drawing/2014/main" val="3456637692"/>
+                    </a:ext>
+                  </a:extLst>
+                </a:gridCol>
+                <a:gridCol w="812800">
+                  <a:extLst>
+                    <a:ext uri="{9D8B030D-6E8A-4147-A177-3AD203B41FA5}">
+                      <a16:colId xmlns:a16="http://schemas.microsoft.com/office/drawing/2014/main" val="971697614"/>
+                    </a:ext>
+                  </a:extLst>
+                </a:gridCol>
+                <a:gridCol w="812800">
+                  <a:extLst>
+                    <a:ext uri="{9D8B030D-6E8A-4147-A177-3AD203B41FA5}">
+                      <a16:colId xmlns:a16="http://schemas.microsoft.com/office/drawing/2014/main" val="1553977771"/>
+                    </a:ext>
+                  </a:extLst>
+                </a:gridCol>
+                <a:gridCol w="812800">
+                  <a:extLst>
+                    <a:ext uri="{9D8B030D-6E8A-4147-A177-3AD203B41FA5}">
+                      <a16:colId xmlns:a16="http://schemas.microsoft.com/office/drawing/2014/main" val="3845023732"/>
+                    </a:ext>
+                  </a:extLst>
+                </a:gridCol>
+                <a:gridCol w="812800">
+                  <a:extLst>
+                    <a:ext uri="{9D8B030D-6E8A-4147-A177-3AD203B41FA5}">
+                      <a16:colId xmlns:a16="http://schemas.microsoft.com/office/drawing/2014/main" val="1528047136"/>
+                    </a:ext>
+                  </a:extLst>
+                </a:gridCol>
+              </a:tblGrid>
+              <a:tr h="370840">
+                <a:tc>
+                  <a:txBody>
+                    <a:bodyPr/>
+                    <a:lstStyle/>
+                    <a:p>
+                      <a:endParaRPr lang="en-US" dirty="0"/>
+                    </a:p>
+                  </a:txBody>
+                  <a:tcPr/>
+                </a:tc>
+                <a:tc>
+                  <a:txBody>
+                    <a:bodyPr/>
+                    <a:lstStyle/>
+                    <a:p>
+                      <a:endParaRPr lang="en-US"/>
+                    </a:p>
+                  </a:txBody>
+                  <a:tcPr/>
+                </a:tc>
+                <a:tc>
+                  <a:txBody>
+                    <a:bodyPr/>
+                    <a:lstStyle/>
+                    <a:p>
+                      <a:endParaRPr lang="en-US"/>
+                    </a:p>
+                  </a:txBody>
+                  <a:tcPr/>
+                </a:tc>
+                <a:tc>
+                  <a:txBody>
+                    <a:bodyPr/>
+                    <a:lstStyle/>
+                    <a:p>
+                      <a:endParaRPr lang="en-US"/>
+                    </a:p>
+                  </a:txBody>
+                  <a:tcPr/>
+                </a:tc>
+                <a:tc>
+                  <a:txBody>
+                    <a:bodyPr/>
+                    <a:lstStyle/>
+                    <a:p>
+                      <a:endParaRPr lang="en-US"/>
+                    </a:p>
+                  </a:txBody>
+                  <a:tcPr/>
+                </a:tc>
+                <a:tc>
+                  <a:txBody>
+                    <a:bodyPr/>
+                    <a:lstStyle/>
+                    <a:p>
+                      <a:endParaRPr lang="en-US"/>
+                    </a:p>
+                  </a:txBody>
+                  <a:tcPr/>
+                </a:tc>
+                <a:tc>
+                  <a:txBody>
+                    <a:bodyPr/>
+                    <a:lstStyle/>
+                    <a:p>
+                      <a:endParaRPr lang="en-US"/>
+                    </a:p>
+                  </a:txBody>
+                  <a:tcPr/>
+                </a:tc>
+                <a:tc>
+                  <a:txBody>
+                    <a:bodyPr/>
+                    <a:lstStyle/>
+                    <a:p>
+                      <a:endParaRPr lang="en-US"/>
+                    </a:p>
+                  </a:txBody>
+                  <a:tcPr/>
+                </a:tc>
+                <a:tc>
+                  <a:txBody>
+                    <a:bodyPr/>
+                    <a:lstStyle/>
+                    <a:p>
+                      <a:endParaRPr lang="en-US"/>
+                    </a:p>
+                  </a:txBody>
+                  <a:tcPr/>
+                </a:tc>
+                <a:tc>
+                  <a:txBody>
+                    <a:bodyPr/>
+                    <a:lstStyle/>
+                    <a:p>
+                      <a:endParaRPr lang="en-US" dirty="0"/>
+                    </a:p>
+                  </a:txBody>
+                  <a:tcPr/>
+                </a:tc>
+                <a:extLst>
+                  <a:ext uri="{0D108BD9-81ED-4DB2-BD59-A6C34878D82A}">
+                    <a16:rowId xmlns:a16="http://schemas.microsoft.com/office/drawing/2014/main" val="1089086439"/>
+                  </a:ext>
+                </a:extLst>
+              </a:tr>
+            </a:tbl>
+          </a:graphicData>
+        </a:graphic>
+      </p:graphicFrame>
+      <p:sp>
+        <p:nvSpPr>
+          <p:cNvPr id="5" name="TextBox 4">
+            <a:extLst>
+              <a:ext uri="{FF2B5EF4-FFF2-40B4-BE49-F238E27FC236}">
+                <a16:creationId xmlns:a16="http://schemas.microsoft.com/office/drawing/2014/main" id="{D10F4189-2339-A40E-5992-038103E1647B}"/>
+              </a:ext>
+            </a:extLst>
+          </p:cNvPr>
+          <p:cNvSpPr txBox="1"/>
+          <p:nvPr/>
+        </p:nvSpPr>
+        <p:spPr>
+          <a:xfrm>
+            <a:off x="2334018" y="6492875"/>
+            <a:ext cx="7763352" cy="369332"/>
+          </a:xfrm>
+          <a:prstGeom prst="rect">
+            <a:avLst/>
+          </a:prstGeom>
+          <a:noFill/>
+        </p:spPr>
+        <p:txBody>
+          <a:bodyPr wrap="square" rtlCol="0">
+            <a:spAutoFit/>
+          </a:bodyPr>
+          <a:lstStyle/>
+          <a:p>
+            <a:r>
+              <a:rPr lang="en-US" dirty="0"/>
+              <a:t>0                1              2               3               4              5                6               7               8                9</a:t>
+            </a:r>
+          </a:p>
+        </p:txBody>
+      </p:sp>
+    </p:spTree>
+    <p:extLst>
+      <p:ext uri="{BB962C8B-B14F-4D97-AF65-F5344CB8AC3E}">
+        <p14:creationId xmlns:p14="http://schemas.microsoft.com/office/powerpoint/2010/main" val="584598898"/>
+      </p:ext>
+    </p:extLst>
+  </p:cSld>
+  <p:clrMapOvr>
+    <a:masterClrMapping/>
+  </p:clrMapOvr>
+</p:sld>
+</file>
+
+<file path=ppt/slides/slide58.xml><?xml version="1.0" encoding="utf-8"?>
+<p:sld xmlns:a="http://schemas.openxmlformats.org/drawingml/2006/main" xmlns:r="http://schemas.openxmlformats.org/officeDocument/2006/relationships" xmlns:p="http://schemas.openxmlformats.org/presentationml/2006/main">
+  <p:cSld>
+    <p:spTree>
+      <p:nvGrpSpPr>
+        <p:cNvPr id="1" name=""/>
+        <p:cNvGrpSpPr/>
+        <p:nvPr/>
+      </p:nvGrpSpPr>
+      <p:grpSpPr>
+        <a:xfrm>
+          <a:off x="0" y="0"/>
+          <a:ext cx="0" cy="0"/>
+          <a:chOff x="0" y="0"/>
+          <a:chExt cx="0" cy="0"/>
+        </a:xfrm>
+      </p:grpSpPr>
+      <p:sp>
+        <p:nvSpPr>
+          <p:cNvPr id="2" name="Title 1">
+            <a:extLst>
+              <a:ext uri="{FF2B5EF4-FFF2-40B4-BE49-F238E27FC236}">
+                <a16:creationId xmlns:a16="http://schemas.microsoft.com/office/drawing/2014/main" id="{9795B6A7-676F-A683-E733-C563CC9443EE}"/>
+              </a:ext>
+            </a:extLst>
+          </p:cNvPr>
+          <p:cNvSpPr>
+            <a:spLocks noGrp="1"/>
+          </p:cNvSpPr>
+          <p:nvPr>
+            <p:ph type="title"/>
+          </p:nvPr>
+        </p:nvSpPr>
+        <p:spPr/>
+        <p:txBody>
+          <a:bodyPr/>
+          <a:lstStyle/>
+          <a:p>
+            <a:r>
+              <a:rPr lang="en-US" dirty="0"/>
+              <a:t>It's not perfect</a:t>
+            </a:r>
+          </a:p>
+        </p:txBody>
+      </p:sp>
+      <p:sp>
+        <p:nvSpPr>
+          <p:cNvPr id="3" name="Content Placeholder 2">
+            <a:extLst>
+              <a:ext uri="{FF2B5EF4-FFF2-40B4-BE49-F238E27FC236}">
+                <a16:creationId xmlns:a16="http://schemas.microsoft.com/office/drawing/2014/main" id="{F804372C-E121-B1C7-2DC5-F5B9D8D7A9E4}"/>
+              </a:ext>
+            </a:extLst>
+          </p:cNvPr>
+          <p:cNvSpPr>
+            <a:spLocks noGrp="1"/>
+          </p:cNvSpPr>
+          <p:nvPr>
+            <p:ph idx="1"/>
+          </p:nvPr>
+        </p:nvSpPr>
+        <p:spPr/>
+        <p:txBody>
+          <a:bodyPr/>
+          <a:lstStyle/>
+          <a:p>
+            <a:r>
+              <a:rPr lang="en-US" dirty="0"/>
+              <a:t>Haphazard union-</a:t>
+            </a:r>
+            <a:r>
+              <a:rPr lang="en-US" dirty="0" err="1"/>
+              <a:t>ing</a:t>
+            </a:r>
+            <a:r>
+              <a:rPr lang="en-US" dirty="0"/>
+              <a:t> could result in a linear structure</a:t>
+            </a:r>
+          </a:p>
+        </p:txBody>
+      </p:sp>
+    </p:spTree>
+    <p:extLst>
+      <p:ext uri="{BB962C8B-B14F-4D97-AF65-F5344CB8AC3E}">
+        <p14:creationId xmlns:p14="http://schemas.microsoft.com/office/powerpoint/2010/main" val="2050126871"/>
+      </p:ext>
+    </p:extLst>
+  </p:cSld>
+  <p:clrMapOvr>
+    <a:masterClrMapping/>
+  </p:clrMapOvr>
+</p:sld>
+</file>
+
+<file path=ppt/slides/slide59.xml><?xml version="1.0" encoding="utf-8"?>
+<p:sld xmlns:a="http://schemas.openxmlformats.org/drawingml/2006/main" xmlns:r="http://schemas.openxmlformats.org/officeDocument/2006/relationships" xmlns:p="http://schemas.openxmlformats.org/presentationml/2006/main">
+  <p:cSld>
+    <p:spTree>
+      <p:nvGrpSpPr>
+        <p:cNvPr id="1" name=""/>
+        <p:cNvGrpSpPr/>
+        <p:nvPr/>
+      </p:nvGrpSpPr>
+      <p:grpSpPr>
+        <a:xfrm>
+          <a:off x="0" y="0"/>
+          <a:ext cx="0" cy="0"/>
+          <a:chOff x="0" y="0"/>
+          <a:chExt cx="0" cy="0"/>
+        </a:xfrm>
+      </p:grpSpPr>
+      <p:sp>
+        <p:nvSpPr>
+          <p:cNvPr id="2" name="Title 1">
+            <a:extLst>
+              <a:ext uri="{FF2B5EF4-FFF2-40B4-BE49-F238E27FC236}">
+                <a16:creationId xmlns:a16="http://schemas.microsoft.com/office/drawing/2014/main" id="{E17ADC79-6B57-D8A5-0511-E8C665743350}"/>
+              </a:ext>
+            </a:extLst>
+          </p:cNvPr>
+          <p:cNvSpPr>
+            <a:spLocks noGrp="1"/>
+          </p:cNvSpPr>
+          <p:nvPr>
+            <p:ph type="title"/>
+          </p:nvPr>
+        </p:nvSpPr>
+        <p:spPr/>
+        <p:txBody>
+          <a:bodyPr/>
+          <a:lstStyle/>
+          <a:p>
+            <a:r>
+              <a:rPr lang="en-US" dirty="0"/>
+              <a:t>Making it better – By Rank / By Size</a:t>
+            </a:r>
+          </a:p>
+        </p:txBody>
+      </p:sp>
+      <p:sp>
+        <p:nvSpPr>
+          <p:cNvPr id="3" name="Content Placeholder 2">
+            <a:extLst>
+              <a:ext uri="{FF2B5EF4-FFF2-40B4-BE49-F238E27FC236}">
+                <a16:creationId xmlns:a16="http://schemas.microsoft.com/office/drawing/2014/main" id="{E0843C5F-BB90-E5D0-3322-3197694F0DB4}"/>
+              </a:ext>
+            </a:extLst>
+          </p:cNvPr>
+          <p:cNvSpPr>
+            <a:spLocks noGrp="1"/>
+          </p:cNvSpPr>
+          <p:nvPr>
+            <p:ph idx="1"/>
+          </p:nvPr>
+        </p:nvSpPr>
+        <p:spPr/>
+        <p:txBody>
+          <a:bodyPr/>
+          <a:lstStyle/>
+          <a:p>
+            <a:r>
+              <a:rPr lang="en-US" dirty="0"/>
+              <a:t>Union by …</a:t>
+            </a:r>
+          </a:p>
+          <a:p>
+            <a:pPr lvl="1"/>
+            <a:r>
+              <a:rPr lang="en-US" dirty="0"/>
+              <a:t>Rank = height of the tree</a:t>
+            </a:r>
+          </a:p>
+          <a:p>
+            <a:pPr lvl="1"/>
+            <a:r>
+              <a:rPr lang="en-US" dirty="0"/>
+              <a:t>Size = number of elements in the tree</a:t>
+            </a:r>
+          </a:p>
+          <a:p>
+            <a:r>
+              <a:rPr lang="en-US" dirty="0"/>
+              <a:t>Keep track of this in a separate array</a:t>
+            </a:r>
+          </a:p>
+          <a:p>
+            <a:pPr lvl="1"/>
+            <a:r>
+              <a:rPr lang="en-US" dirty="0"/>
+              <a:t>Only need to keep track of the root's rank or size</a:t>
+            </a:r>
+          </a:p>
+        </p:txBody>
+      </p:sp>
+    </p:spTree>
+    <p:extLst>
+      <p:ext uri="{BB962C8B-B14F-4D97-AF65-F5344CB8AC3E}">
+        <p14:creationId xmlns:p14="http://schemas.microsoft.com/office/powerpoint/2010/main" val="2090501886"/>
       </p:ext>
     </p:extLst>
   </p:cSld>
@@ -10003,6 +11973,1145 @@
     <p:extLst>
       <p:ext uri="{BB962C8B-B14F-4D97-AF65-F5344CB8AC3E}">
         <p14:creationId xmlns:p14="http://schemas.microsoft.com/office/powerpoint/2010/main" val="4056992754"/>
+      </p:ext>
+    </p:extLst>
+  </p:cSld>
+  <p:clrMapOvr>
+    <a:masterClrMapping/>
+  </p:clrMapOvr>
+</p:sld>
+</file>
+
+<file path=ppt/slides/slide60.xml><?xml version="1.0" encoding="utf-8"?>
+<p:sld xmlns:a="http://schemas.openxmlformats.org/drawingml/2006/main" xmlns:r="http://schemas.openxmlformats.org/officeDocument/2006/relationships" xmlns:p="http://schemas.openxmlformats.org/presentationml/2006/main">
+  <p:cSld>
+    <p:spTree>
+      <p:nvGrpSpPr>
+        <p:cNvPr id="1" name=""/>
+        <p:cNvGrpSpPr/>
+        <p:nvPr/>
+      </p:nvGrpSpPr>
+      <p:grpSpPr>
+        <a:xfrm>
+          <a:off x="0" y="0"/>
+          <a:ext cx="0" cy="0"/>
+          <a:chOff x="0" y="0"/>
+          <a:chExt cx="0" cy="0"/>
+        </a:xfrm>
+      </p:grpSpPr>
+      <p:sp>
+        <p:nvSpPr>
+          <p:cNvPr id="2" name="Title 1">
+            <a:extLst>
+              <a:ext uri="{FF2B5EF4-FFF2-40B4-BE49-F238E27FC236}">
+                <a16:creationId xmlns:a16="http://schemas.microsoft.com/office/drawing/2014/main" id="{DDF9AF86-AB5A-2189-7597-DDE5D32F86EF}"/>
+              </a:ext>
+            </a:extLst>
+          </p:cNvPr>
+          <p:cNvSpPr>
+            <a:spLocks noGrp="1"/>
+          </p:cNvSpPr>
+          <p:nvPr>
+            <p:ph type="title"/>
+          </p:nvPr>
+        </p:nvSpPr>
+        <p:spPr/>
+        <p:txBody>
+          <a:bodyPr/>
+          <a:lstStyle/>
+          <a:p>
+            <a:r>
+              <a:rPr lang="en-US" dirty="0"/>
+              <a:t>Making it better – Path Compression</a:t>
+            </a:r>
+          </a:p>
+        </p:txBody>
+      </p:sp>
+      <p:sp>
+        <p:nvSpPr>
+          <p:cNvPr id="3" name="Content Placeholder 2">
+            <a:extLst>
+              <a:ext uri="{FF2B5EF4-FFF2-40B4-BE49-F238E27FC236}">
+                <a16:creationId xmlns:a16="http://schemas.microsoft.com/office/drawing/2014/main" id="{7C07A607-635A-F92F-2808-733ED47333E0}"/>
+              </a:ext>
+            </a:extLst>
+          </p:cNvPr>
+          <p:cNvSpPr>
+            <a:spLocks noGrp="1"/>
+          </p:cNvSpPr>
+          <p:nvPr>
+            <p:ph idx="1"/>
+          </p:nvPr>
+        </p:nvSpPr>
+        <p:spPr/>
+        <p:txBody>
+          <a:bodyPr/>
+          <a:lstStyle/>
+          <a:p>
+            <a:r>
+              <a:rPr lang="en-US" dirty="0"/>
+              <a:t>When finding, if we aren't directly reporting to the manager, make it so we do directly report to the manager.</a:t>
+            </a:r>
+          </a:p>
+          <a:p>
+            <a:pPr lvl="1"/>
+            <a:r>
+              <a:rPr lang="en-US" dirty="0"/>
+              <a:t>Redraw edges of the tree</a:t>
+            </a:r>
+          </a:p>
+          <a:p>
+            <a:endParaRPr lang="en-US" dirty="0"/>
+          </a:p>
+          <a:p>
+            <a:r>
+              <a:rPr lang="en-US" dirty="0"/>
+              <a:t>Makes the tree wide, but fast lookup. </a:t>
+            </a:r>
+          </a:p>
+          <a:p>
+            <a:endParaRPr lang="en-US" dirty="0"/>
+          </a:p>
+          <a:p>
+            <a:pPr lvl="1"/>
+            <a:endParaRPr lang="en-US" dirty="0"/>
+          </a:p>
+        </p:txBody>
+      </p:sp>
+    </p:spTree>
+    <p:extLst>
+      <p:ext uri="{BB962C8B-B14F-4D97-AF65-F5344CB8AC3E}">
+        <p14:creationId xmlns:p14="http://schemas.microsoft.com/office/powerpoint/2010/main" val="4148490510"/>
+      </p:ext>
+    </p:extLst>
+  </p:cSld>
+  <p:clrMapOvr>
+    <a:masterClrMapping/>
+  </p:clrMapOvr>
+</p:sld>
+</file>
+
+<file path=ppt/slides/slide61.xml><?xml version="1.0" encoding="utf-8"?>
+<p:sld xmlns:a="http://schemas.openxmlformats.org/drawingml/2006/main" xmlns:r="http://schemas.openxmlformats.org/officeDocument/2006/relationships" xmlns:p="http://schemas.openxmlformats.org/presentationml/2006/main">
+  <p:cSld>
+    <p:spTree>
+      <p:nvGrpSpPr>
+        <p:cNvPr id="1" name="">
+          <a:extLst>
+            <a:ext uri="{FF2B5EF4-FFF2-40B4-BE49-F238E27FC236}">
+              <a16:creationId xmlns:a16="http://schemas.microsoft.com/office/drawing/2014/main" id="{85C2A611-F25D-C7F3-73BC-C761E0727B5A}"/>
+            </a:ext>
+          </a:extLst>
+        </p:cNvPr>
+        <p:cNvGrpSpPr/>
+        <p:nvPr/>
+      </p:nvGrpSpPr>
+      <p:grpSpPr>
+        <a:xfrm>
+          <a:off x="0" y="0"/>
+          <a:ext cx="0" cy="0"/>
+          <a:chOff x="0" y="0"/>
+          <a:chExt cx="0" cy="0"/>
+        </a:xfrm>
+      </p:grpSpPr>
+      <p:sp>
+        <p:nvSpPr>
+          <p:cNvPr id="2" name="Title 1">
+            <a:extLst>
+              <a:ext uri="{FF2B5EF4-FFF2-40B4-BE49-F238E27FC236}">
+                <a16:creationId xmlns:a16="http://schemas.microsoft.com/office/drawing/2014/main" id="{A9AE0455-B6F9-999F-BF59-A0A3CC531926}"/>
+              </a:ext>
+            </a:extLst>
+          </p:cNvPr>
+          <p:cNvSpPr>
+            <a:spLocks noGrp="1"/>
+          </p:cNvSpPr>
+          <p:nvPr>
+            <p:ph type="title"/>
+          </p:nvPr>
+        </p:nvSpPr>
+        <p:spPr>
+          <a:xfrm rot="16200000">
+            <a:off x="-4595018" y="399593"/>
+            <a:ext cx="10515600" cy="1325563"/>
+          </a:xfrm>
+        </p:spPr>
+        <p:txBody>
+          <a:bodyPr/>
+          <a:lstStyle/>
+          <a:p>
+            <a:r>
+              <a:rPr lang="en-US" dirty="0"/>
+              <a:t>Code version 2</a:t>
+            </a:r>
+          </a:p>
+        </p:txBody>
+      </p:sp>
+      <p:pic>
+        <p:nvPicPr>
+          <p:cNvPr id="7" name="Content Placeholder 6" descr="A computer screen shot of a program code&#10;&#10;AI-generated content may be incorrect.">
+            <a:extLst>
+              <a:ext uri="{FF2B5EF4-FFF2-40B4-BE49-F238E27FC236}">
+                <a16:creationId xmlns:a16="http://schemas.microsoft.com/office/drawing/2014/main" id="{37283147-960A-584E-DEBA-86F2AF4C890B}"/>
+              </a:ext>
+            </a:extLst>
+          </p:cNvPr>
+          <p:cNvPicPr>
+            <a:picLocks noGrp="1" noChangeAspect="1"/>
+          </p:cNvPicPr>
+          <p:nvPr>
+            <p:ph idx="1"/>
+          </p:nvPr>
+        </p:nvPicPr>
+        <p:blipFill>
+          <a:blip r:embed="rId2"/>
+          <a:srcRect l="18066" t="7578" r="7393" b="16245"/>
+          <a:stretch>
+            <a:fillRect/>
+          </a:stretch>
+        </p:blipFill>
+        <p:spPr>
+          <a:xfrm>
+            <a:off x="1186742" y="211719"/>
+            <a:ext cx="9818516" cy="6271272"/>
+          </a:xfrm>
+          <a:prstGeom prst="rect">
+            <a:avLst/>
+          </a:prstGeom>
+        </p:spPr>
+      </p:pic>
+      <p:sp>
+        <p:nvSpPr>
+          <p:cNvPr id="5" name="TextBox 4">
+            <a:extLst>
+              <a:ext uri="{FF2B5EF4-FFF2-40B4-BE49-F238E27FC236}">
+                <a16:creationId xmlns:a16="http://schemas.microsoft.com/office/drawing/2014/main" id="{E1F51A59-93DC-0614-B018-71102621F619}"/>
+              </a:ext>
+            </a:extLst>
+          </p:cNvPr>
+          <p:cNvSpPr txBox="1"/>
+          <p:nvPr/>
+        </p:nvSpPr>
+        <p:spPr>
+          <a:xfrm>
+            <a:off x="1077686" y="6433457"/>
+            <a:ext cx="5704318" cy="369332"/>
+          </a:xfrm>
+          <a:prstGeom prst="rect">
+            <a:avLst/>
+          </a:prstGeom>
+          <a:noFill/>
+        </p:spPr>
+        <p:txBody>
+          <a:bodyPr wrap="none" rtlCol="0">
+            <a:spAutoFit/>
+          </a:bodyPr>
+          <a:lstStyle/>
+          <a:p>
+            <a:r>
+              <a:rPr lang="en-US" dirty="0"/>
+              <a:t>From </a:t>
+            </a:r>
+            <a:r>
+              <a:rPr lang="en-US" dirty="0">
+                <a:hlinkClick r:id="rId3"/>
+              </a:rPr>
+              <a:t>https://www.youtube.com/watch?v=92UpvDXc8fs</a:t>
+            </a:r>
+            <a:r>
+              <a:rPr lang="en-US" dirty="0"/>
+              <a:t> </a:t>
+            </a:r>
+          </a:p>
+        </p:txBody>
+      </p:sp>
+    </p:spTree>
+    <p:extLst>
+      <p:ext uri="{BB962C8B-B14F-4D97-AF65-F5344CB8AC3E}">
+        <p14:creationId xmlns:p14="http://schemas.microsoft.com/office/powerpoint/2010/main" val="592129670"/>
+      </p:ext>
+    </p:extLst>
+  </p:cSld>
+  <p:clrMapOvr>
+    <a:masterClrMapping/>
+  </p:clrMapOvr>
+</p:sld>
+</file>
+
+<file path=ppt/slides/slide62.xml><?xml version="1.0" encoding="utf-8"?>
+<p:sld xmlns:a="http://schemas.openxmlformats.org/drawingml/2006/main" xmlns:r="http://schemas.openxmlformats.org/officeDocument/2006/relationships" xmlns:p="http://schemas.openxmlformats.org/presentationml/2006/main">
+  <p:cSld>
+    <p:spTree>
+      <p:nvGrpSpPr>
+        <p:cNvPr id="1" name=""/>
+        <p:cNvGrpSpPr/>
+        <p:nvPr/>
+      </p:nvGrpSpPr>
+      <p:grpSpPr>
+        <a:xfrm>
+          <a:off x="0" y="0"/>
+          <a:ext cx="0" cy="0"/>
+          <a:chOff x="0" y="0"/>
+          <a:chExt cx="0" cy="0"/>
+        </a:xfrm>
+      </p:grpSpPr>
+      <p:sp>
+        <p:nvSpPr>
+          <p:cNvPr id="2" name="Title 1">
+            <a:extLst>
+              <a:ext uri="{FF2B5EF4-FFF2-40B4-BE49-F238E27FC236}">
+                <a16:creationId xmlns:a16="http://schemas.microsoft.com/office/drawing/2014/main" id="{9DE4B5B8-2320-8BAA-D887-FE8FE5913458}"/>
+              </a:ext>
+            </a:extLst>
+          </p:cNvPr>
+          <p:cNvSpPr>
+            <a:spLocks noGrp="1"/>
+          </p:cNvSpPr>
+          <p:nvPr>
+            <p:ph type="title"/>
+          </p:nvPr>
+        </p:nvSpPr>
+        <p:spPr/>
+        <p:txBody>
+          <a:bodyPr/>
+          <a:lstStyle/>
+          <a:p>
+            <a:r>
+              <a:rPr lang="en-US" dirty="0"/>
+              <a:t>Complexity of Union-Find</a:t>
+            </a:r>
+          </a:p>
+        </p:txBody>
+      </p:sp>
+      <mc:AlternateContent xmlns:mc="http://schemas.openxmlformats.org/markup-compatibility/2006">
+        <mc:Choice xmlns:a14="http://schemas.microsoft.com/office/drawing/2010/main" Requires="a14">
+          <p:sp>
+            <p:nvSpPr>
+              <p:cNvPr id="3" name="Content Placeholder 2">
+                <a:extLst>
+                  <a:ext uri="{FF2B5EF4-FFF2-40B4-BE49-F238E27FC236}">
+                    <a16:creationId xmlns:a16="http://schemas.microsoft.com/office/drawing/2014/main" id="{703CEC5A-D3D1-4D03-A418-B23D56554B2C}"/>
+                  </a:ext>
+                </a:extLst>
+              </p:cNvPr>
+              <p:cNvSpPr>
+                <a:spLocks noGrp="1"/>
+              </p:cNvSpPr>
+              <p:nvPr>
+                <p:ph idx="1"/>
+              </p:nvPr>
+            </p:nvSpPr>
+            <p:spPr/>
+            <p:txBody>
+              <a:bodyPr>
+                <a:normAutofit/>
+              </a:bodyPr>
+              <a:lstStyle/>
+              <a:p>
+                <a:r>
+                  <a:rPr lang="en-US" dirty="0"/>
+                  <a:t>Just path compression:  </a:t>
+                </a:r>
+              </a:p>
+              <a:p>
+                <a:r>
+                  <a:rPr lang="en-US" dirty="0"/>
+                  <a:t>Just union-by-rank, no path compression:</a:t>
+                </a:r>
+              </a:p>
+              <a:p>
+                <a:r>
+                  <a:rPr lang="en-US" dirty="0"/>
+                  <a:t>Union-by-rank WITH path compression:  </a:t>
+                </a:r>
+              </a:p>
+              <a:p>
+                <a:pPr lvl="1"/>
+                <a14:m>
+                  <m:oMath xmlns:m="http://schemas.openxmlformats.org/officeDocument/2006/math">
+                    <m:r>
+                      <a:rPr lang="en-US" i="1" dirty="0" smtClean="0">
+                        <a:latin typeface="Cambria Math" panose="02040503050406030204" pitchFamily="18" charset="0"/>
+                      </a:rPr>
+                      <m:t>𝛼</m:t>
+                    </m:r>
+                    <m:r>
+                      <a:rPr lang="en-US" b="0" i="1" dirty="0" smtClean="0">
+                        <a:latin typeface="Cambria Math" panose="02040503050406030204" pitchFamily="18" charset="0"/>
+                      </a:rPr>
+                      <m:t> </m:t>
+                    </m:r>
+                  </m:oMath>
+                </a14:m>
+                <a:r>
+                  <a:rPr lang="en-US" dirty="0"/>
+                  <a:t>here is the Inverse Ackermann function</a:t>
+                </a:r>
+              </a:p>
+              <a:p>
+                <a:pPr lvl="2"/>
+                <a:r>
+                  <a:rPr lang="en-US" dirty="0"/>
+                  <a:t>Ackermann function grows </a:t>
+                </a:r>
+                <a:r>
+                  <a:rPr lang="en-US" i="1" dirty="0"/>
+                  <a:t>really really fast</a:t>
+                </a:r>
+              </a:p>
+              <a:p>
+                <a:pPr lvl="2"/>
+                <a:r>
+                  <a:rPr lang="en-US" dirty="0"/>
+                  <a:t>Inverse means it grows slowly</a:t>
+                </a:r>
+              </a:p>
+              <a:p>
+                <a:pPr lvl="2"/>
+                <a:r>
+                  <a:rPr lang="en-US" dirty="0"/>
+                  <a:t>Essentially &lt;=4 for any quantifiable n. </a:t>
+                </a:r>
+              </a:p>
+              <a:p>
+                <a:pPr lvl="2"/>
+                <a:endParaRPr lang="en-US" dirty="0"/>
+              </a:p>
+              <a:p>
+                <a:r>
+                  <a:rPr lang="en-US" dirty="0"/>
+                  <a:t>So, not actually constant time, but essentially free.</a:t>
+                </a:r>
+              </a:p>
+            </p:txBody>
+          </p:sp>
+        </mc:Choice>
+        <mc:Fallback>
+          <p:sp>
+            <p:nvSpPr>
+              <p:cNvPr id="3" name="Content Placeholder 2">
+                <a:extLst>
+                  <a:ext uri="{FF2B5EF4-FFF2-40B4-BE49-F238E27FC236}">
+                    <a16:creationId xmlns:a16="http://schemas.microsoft.com/office/drawing/2014/main" id="{703CEC5A-D3D1-4D03-A418-B23D56554B2C}"/>
+                  </a:ext>
+                </a:extLst>
+              </p:cNvPr>
+              <p:cNvSpPr>
+                <a:spLocks noGrp="1" noRot="1" noChangeAspect="1" noMove="1" noResize="1" noEditPoints="1" noAdjustHandles="1" noChangeArrowheads="1" noChangeShapeType="1" noTextEdit="1"/>
+              </p:cNvSpPr>
+              <p:nvPr>
+                <p:ph idx="1"/>
+              </p:nvPr>
+            </p:nvSpPr>
+            <p:spPr>
+              <a:blipFill>
+                <a:blip r:embed="rId2"/>
+                <a:stretch>
+                  <a:fillRect l="-1086" t="-2326"/>
+                </a:stretch>
+              </a:blipFill>
+            </p:spPr>
+            <p:txBody>
+              <a:bodyPr/>
+              <a:lstStyle/>
+              <a:p>
+                <a:r>
+                  <a:rPr lang="en-US">
+                    <a:noFill/>
+                  </a:rPr>
+                  <a:t> </a:t>
+                </a:r>
+              </a:p>
+            </p:txBody>
+          </p:sp>
+        </mc:Fallback>
+      </mc:AlternateContent>
+      <p:pic>
+        <p:nvPicPr>
+          <p:cNvPr id="5" name="Picture 4">
+            <a:extLst>
+              <a:ext uri="{FF2B5EF4-FFF2-40B4-BE49-F238E27FC236}">
+                <a16:creationId xmlns:a16="http://schemas.microsoft.com/office/drawing/2014/main" id="{C718944C-9AD1-0705-C406-D7BBFA9D0805}"/>
+              </a:ext>
+            </a:extLst>
+          </p:cNvPr>
+          <p:cNvPicPr>
+            <a:picLocks noChangeAspect="1"/>
+          </p:cNvPicPr>
+          <p:nvPr/>
+        </p:nvPicPr>
+        <p:blipFill>
+          <a:blip r:embed="rId3"/>
+          <a:stretch>
+            <a:fillRect/>
+          </a:stretch>
+        </p:blipFill>
+        <p:spPr>
+          <a:xfrm>
+            <a:off x="4937020" y="1910175"/>
+            <a:ext cx="2944750" cy="364299"/>
+          </a:xfrm>
+          <a:prstGeom prst="rect">
+            <a:avLst/>
+          </a:prstGeom>
+        </p:spPr>
+      </p:pic>
+      <p:pic>
+        <p:nvPicPr>
+          <p:cNvPr id="7" name="Picture 6">
+            <a:extLst>
+              <a:ext uri="{FF2B5EF4-FFF2-40B4-BE49-F238E27FC236}">
+                <a16:creationId xmlns:a16="http://schemas.microsoft.com/office/drawing/2014/main" id="{604F1457-DE12-6222-63D0-D6078D595F80}"/>
+              </a:ext>
+            </a:extLst>
+          </p:cNvPr>
+          <p:cNvPicPr>
+            <a:picLocks noChangeAspect="1"/>
+          </p:cNvPicPr>
+          <p:nvPr/>
+        </p:nvPicPr>
+        <p:blipFill>
+          <a:blip r:embed="rId4"/>
+          <a:stretch>
+            <a:fillRect/>
+          </a:stretch>
+        </p:blipFill>
+        <p:spPr>
+          <a:xfrm>
+            <a:off x="7706240" y="2409411"/>
+            <a:ext cx="1353111" cy="364299"/>
+          </a:xfrm>
+          <a:prstGeom prst="rect">
+            <a:avLst/>
+          </a:prstGeom>
+        </p:spPr>
+      </p:pic>
+      <p:pic>
+        <p:nvPicPr>
+          <p:cNvPr id="9" name="Picture 8">
+            <a:extLst>
+              <a:ext uri="{FF2B5EF4-FFF2-40B4-BE49-F238E27FC236}">
+                <a16:creationId xmlns:a16="http://schemas.microsoft.com/office/drawing/2014/main" id="{EE4F94C6-9A7B-6D14-C32B-C48A2CAF8360}"/>
+              </a:ext>
+            </a:extLst>
+          </p:cNvPr>
+          <p:cNvPicPr>
+            <a:picLocks noChangeAspect="1"/>
+          </p:cNvPicPr>
+          <p:nvPr/>
+        </p:nvPicPr>
+        <p:blipFill>
+          <a:blip r:embed="rId5"/>
+          <a:stretch>
+            <a:fillRect/>
+          </a:stretch>
+        </p:blipFill>
+        <p:spPr>
+          <a:xfrm>
+            <a:off x="7325194" y="2908647"/>
+            <a:ext cx="1113152" cy="389603"/>
+          </a:xfrm>
+          <a:prstGeom prst="rect">
+            <a:avLst/>
+          </a:prstGeom>
+        </p:spPr>
+      </p:pic>
+    </p:spTree>
+    <p:extLst>
+      <p:ext uri="{BB962C8B-B14F-4D97-AF65-F5344CB8AC3E}">
+        <p14:creationId xmlns:p14="http://schemas.microsoft.com/office/powerpoint/2010/main" val="4098643212"/>
+      </p:ext>
+    </p:extLst>
+  </p:cSld>
+  <p:clrMapOvr>
+    <a:masterClrMapping/>
+  </p:clrMapOvr>
+</p:sld>
+</file>
+
+<file path=ppt/slides/slide63.xml><?xml version="1.0" encoding="utf-8"?>
+<p:sld xmlns:a="http://schemas.openxmlformats.org/drawingml/2006/main" xmlns:r="http://schemas.openxmlformats.org/officeDocument/2006/relationships" xmlns:p="http://schemas.openxmlformats.org/presentationml/2006/main">
+  <p:cSld>
+    <p:spTree>
+      <p:nvGrpSpPr>
+        <p:cNvPr id="1" name=""/>
+        <p:cNvGrpSpPr/>
+        <p:nvPr/>
+      </p:nvGrpSpPr>
+      <p:grpSpPr>
+        <a:xfrm>
+          <a:off x="0" y="0"/>
+          <a:ext cx="0" cy="0"/>
+          <a:chOff x="0" y="0"/>
+          <a:chExt cx="0" cy="0"/>
+        </a:xfrm>
+      </p:grpSpPr>
+      <p:sp>
+        <p:nvSpPr>
+          <p:cNvPr id="2" name="Title 1">
+            <a:extLst>
+              <a:ext uri="{FF2B5EF4-FFF2-40B4-BE49-F238E27FC236}">
+                <a16:creationId xmlns:a16="http://schemas.microsoft.com/office/drawing/2014/main" id="{864A946F-1205-7E43-2214-9C9AFE25D978}"/>
+              </a:ext>
+            </a:extLst>
+          </p:cNvPr>
+          <p:cNvSpPr>
+            <a:spLocks noGrp="1"/>
+          </p:cNvSpPr>
+          <p:nvPr>
+            <p:ph type="title"/>
+          </p:nvPr>
+        </p:nvSpPr>
+        <p:spPr/>
+        <p:txBody>
+          <a:bodyPr/>
+          <a:lstStyle/>
+          <a:p>
+            <a:r>
+              <a:rPr lang="en-US" dirty="0"/>
+              <a:t>Applications</a:t>
+            </a:r>
+          </a:p>
+        </p:txBody>
+      </p:sp>
+      <p:sp>
+        <p:nvSpPr>
+          <p:cNvPr id="3" name="Content Placeholder 2">
+            <a:extLst>
+              <a:ext uri="{FF2B5EF4-FFF2-40B4-BE49-F238E27FC236}">
+                <a16:creationId xmlns:a16="http://schemas.microsoft.com/office/drawing/2014/main" id="{7FE3802E-523B-8FD7-2F0F-A6570ADEF14F}"/>
+              </a:ext>
+            </a:extLst>
+          </p:cNvPr>
+          <p:cNvSpPr>
+            <a:spLocks noGrp="1"/>
+          </p:cNvSpPr>
+          <p:nvPr>
+            <p:ph idx="1"/>
+          </p:nvPr>
+        </p:nvSpPr>
+        <p:spPr/>
+        <p:txBody>
+          <a:bodyPr/>
+          <a:lstStyle/>
+          <a:p>
+            <a:r>
+              <a:rPr lang="en-US" dirty="0"/>
+              <a:t>Finding a minimum spanning tree</a:t>
+            </a:r>
+          </a:p>
+          <a:p>
+            <a:pPr lvl="1"/>
+            <a:r>
+              <a:rPr lang="en-US" dirty="0"/>
+              <a:t>Kruskal's MST algorithm</a:t>
+            </a:r>
+          </a:p>
+          <a:p>
+            <a:r>
+              <a:rPr lang="en-US" dirty="0"/>
+              <a:t>How many connected components of a graph are there?</a:t>
+            </a:r>
+          </a:p>
+          <a:p>
+            <a:endParaRPr lang="en-US" dirty="0"/>
+          </a:p>
+          <a:p>
+            <a:endParaRPr lang="en-US" dirty="0"/>
+          </a:p>
+          <a:p>
+            <a:r>
+              <a:rPr lang="en-US" dirty="0"/>
+              <a:t>Easy-to-implement and efficient graph algorithms have wide-reaching effects.</a:t>
+            </a:r>
+          </a:p>
+        </p:txBody>
+      </p:sp>
+    </p:spTree>
+    <p:extLst>
+      <p:ext uri="{BB962C8B-B14F-4D97-AF65-F5344CB8AC3E}">
+        <p14:creationId xmlns:p14="http://schemas.microsoft.com/office/powerpoint/2010/main" val="3687669891"/>
+      </p:ext>
+    </p:extLst>
+  </p:cSld>
+  <p:clrMapOvr>
+    <a:masterClrMapping/>
+  </p:clrMapOvr>
+</p:sld>
+</file>
+
+<file path=ppt/slides/slide64.xml><?xml version="1.0" encoding="utf-8"?>
+<p:sld xmlns:a="http://schemas.openxmlformats.org/drawingml/2006/main" xmlns:r="http://schemas.openxmlformats.org/officeDocument/2006/relationships" xmlns:p="http://schemas.openxmlformats.org/presentationml/2006/main">
+  <p:cSld>
+    <p:spTree>
+      <p:nvGrpSpPr>
+        <p:cNvPr id="1" name=""/>
+        <p:cNvGrpSpPr/>
+        <p:nvPr/>
+      </p:nvGrpSpPr>
+      <p:grpSpPr>
+        <a:xfrm>
+          <a:off x="0" y="0"/>
+          <a:ext cx="0" cy="0"/>
+          <a:chOff x="0" y="0"/>
+          <a:chExt cx="0" cy="0"/>
+        </a:xfrm>
+      </p:grpSpPr>
+      <p:sp>
+        <p:nvSpPr>
+          <p:cNvPr id="2" name="Title 1">
+            <a:extLst>
+              <a:ext uri="{FF2B5EF4-FFF2-40B4-BE49-F238E27FC236}">
+                <a16:creationId xmlns:a16="http://schemas.microsoft.com/office/drawing/2014/main" id="{C52B2CBF-ABB2-004C-0E96-A3AAD7144131}"/>
+              </a:ext>
+            </a:extLst>
+          </p:cNvPr>
+          <p:cNvSpPr>
+            <a:spLocks noGrp="1"/>
+          </p:cNvSpPr>
+          <p:nvPr>
+            <p:ph type="title"/>
+          </p:nvPr>
+        </p:nvSpPr>
+        <p:spPr/>
+        <p:txBody>
+          <a:bodyPr/>
+          <a:lstStyle/>
+          <a:p>
+            <a:r>
+              <a:rPr lang="en-US" dirty="0"/>
+              <a:t>Cool-Down</a:t>
+            </a:r>
+          </a:p>
+        </p:txBody>
+      </p:sp>
+      <p:sp>
+        <p:nvSpPr>
+          <p:cNvPr id="3" name="Content Placeholder 2">
+            <a:extLst>
+              <a:ext uri="{FF2B5EF4-FFF2-40B4-BE49-F238E27FC236}">
+                <a16:creationId xmlns:a16="http://schemas.microsoft.com/office/drawing/2014/main" id="{FE280F44-A3A6-1DA9-1346-ED126D52C9EA}"/>
+              </a:ext>
+            </a:extLst>
+          </p:cNvPr>
+          <p:cNvSpPr>
+            <a:spLocks noGrp="1"/>
+          </p:cNvSpPr>
+          <p:nvPr>
+            <p:ph idx="1"/>
+          </p:nvPr>
+        </p:nvSpPr>
+        <p:spPr/>
+        <p:txBody>
+          <a:bodyPr>
+            <a:normAutofit fontScale="92500" lnSpcReduction="20000"/>
+          </a:bodyPr>
+          <a:lstStyle/>
+          <a:p>
+            <a:r>
+              <a:rPr lang="en-US" dirty="0"/>
+              <a:t>In your teams, visualize a sequence of Union-Find operations as an array and as a forest. Use by-rank and path optimization. Break ties with a preference for smaller numbers.</a:t>
+            </a:r>
+          </a:p>
+          <a:p>
+            <a:pPr lvl="1"/>
+            <a:endParaRPr lang="en-US" dirty="0"/>
+          </a:p>
+          <a:p>
+            <a:pPr lvl="1"/>
+            <a:r>
+              <a:rPr lang="en-US" dirty="0"/>
+              <a:t>Union(7,1)</a:t>
+            </a:r>
+          </a:p>
+          <a:p>
+            <a:pPr lvl="1"/>
+            <a:r>
+              <a:rPr lang="en-US" dirty="0"/>
+              <a:t>Union(4,2)</a:t>
+            </a:r>
+          </a:p>
+          <a:p>
+            <a:pPr lvl="1"/>
+            <a:r>
+              <a:rPr lang="en-US" dirty="0"/>
+              <a:t>Union(8,5)</a:t>
+            </a:r>
+          </a:p>
+          <a:p>
+            <a:pPr lvl="1"/>
+            <a:r>
+              <a:rPr lang="en-US" dirty="0"/>
+              <a:t>Union(0,3)</a:t>
+            </a:r>
+          </a:p>
+          <a:p>
+            <a:pPr lvl="1"/>
+            <a:r>
+              <a:rPr lang="en-US" dirty="0"/>
+              <a:t>Union(6,9)</a:t>
+            </a:r>
+          </a:p>
+          <a:p>
+            <a:pPr lvl="1"/>
+            <a:r>
+              <a:rPr lang="en-US" dirty="0"/>
+              <a:t>Union(2,7)</a:t>
+            </a:r>
+          </a:p>
+          <a:p>
+            <a:pPr lvl="1"/>
+            <a:r>
+              <a:rPr lang="en-US" dirty="0"/>
+              <a:t>Union(5,9)</a:t>
+            </a:r>
+          </a:p>
+          <a:p>
+            <a:pPr lvl="1"/>
+            <a:r>
+              <a:rPr lang="en-US" dirty="0"/>
+              <a:t>Union(8,1)</a:t>
+            </a:r>
+          </a:p>
+          <a:p>
+            <a:pPr lvl="1"/>
+            <a:r>
+              <a:rPr lang="en-US" dirty="0"/>
+              <a:t>Union(4,6)</a:t>
+            </a:r>
+          </a:p>
+          <a:p>
+            <a:r>
+              <a:rPr lang="en-US" dirty="0"/>
+              <a:t>What is Find(4)?</a:t>
+            </a:r>
+          </a:p>
+        </p:txBody>
+      </p:sp>
+    </p:spTree>
+    <p:extLst>
+      <p:ext uri="{BB962C8B-B14F-4D97-AF65-F5344CB8AC3E}">
+        <p14:creationId xmlns:p14="http://schemas.microsoft.com/office/powerpoint/2010/main" val="2437093207"/>
+      </p:ext>
+    </p:extLst>
+  </p:cSld>
+  <p:clrMapOvr>
+    <a:masterClrMapping/>
+  </p:clrMapOvr>
+</p:sld>
+</file>
+
+<file path=ppt/slides/slide65.xml><?xml version="1.0" encoding="utf-8"?>
+<p:sld xmlns:a="http://schemas.openxmlformats.org/drawingml/2006/main" xmlns:r="http://schemas.openxmlformats.org/officeDocument/2006/relationships" xmlns:p="http://schemas.openxmlformats.org/presentationml/2006/main">
+  <p:cSld>
+    <p:spTree>
+      <p:nvGrpSpPr>
+        <p:cNvPr id="1" name=""/>
+        <p:cNvGrpSpPr/>
+        <p:nvPr/>
+      </p:nvGrpSpPr>
+      <p:grpSpPr>
+        <a:xfrm>
+          <a:off x="0" y="0"/>
+          <a:ext cx="0" cy="0"/>
+          <a:chOff x="0" y="0"/>
+          <a:chExt cx="0" cy="0"/>
+        </a:xfrm>
+      </p:grpSpPr>
+      <p:sp>
+        <p:nvSpPr>
+          <p:cNvPr id="2" name="Title 1">
+            <a:extLst>
+              <a:ext uri="{FF2B5EF4-FFF2-40B4-BE49-F238E27FC236}">
+                <a16:creationId xmlns:a16="http://schemas.microsoft.com/office/drawing/2014/main" id="{36C90977-7F38-7937-1421-F15AB3FF7F8E}"/>
+              </a:ext>
+            </a:extLst>
+          </p:cNvPr>
+          <p:cNvSpPr>
+            <a:spLocks noGrp="1"/>
+          </p:cNvSpPr>
+          <p:nvPr>
+            <p:ph type="title"/>
+          </p:nvPr>
+        </p:nvSpPr>
+        <p:spPr/>
+        <p:txBody>
+          <a:bodyPr/>
+          <a:lstStyle/>
+          <a:p>
+            <a:r>
+              <a:rPr lang="en-US" dirty="0"/>
+              <a:t>Cool-Down</a:t>
+            </a:r>
+          </a:p>
+        </p:txBody>
+      </p:sp>
+      <p:sp>
+        <p:nvSpPr>
+          <p:cNvPr id="3" name="Content Placeholder 2">
+            <a:extLst>
+              <a:ext uri="{FF2B5EF4-FFF2-40B4-BE49-F238E27FC236}">
+                <a16:creationId xmlns:a16="http://schemas.microsoft.com/office/drawing/2014/main" id="{70E6F9D5-24E1-2A13-37A4-0BB44CE0E7B0}"/>
+              </a:ext>
+            </a:extLst>
+          </p:cNvPr>
+          <p:cNvSpPr>
+            <a:spLocks noGrp="1"/>
+          </p:cNvSpPr>
+          <p:nvPr>
+            <p:ph idx="1"/>
+          </p:nvPr>
+        </p:nvSpPr>
+        <p:spPr/>
+        <p:txBody>
+          <a:bodyPr/>
+          <a:lstStyle/>
+          <a:p>
+            <a:r>
+              <a:rPr lang="en-US" dirty="0"/>
+              <a:t>Complete "Number of Provinces" </a:t>
+            </a:r>
+            <a:r>
+              <a:rPr lang="en-US" dirty="0" err="1"/>
+              <a:t>LeetCode</a:t>
+            </a:r>
+            <a:r>
+              <a:rPr lang="en-US" dirty="0"/>
+              <a:t> problem using </a:t>
+            </a:r>
+            <a:r>
+              <a:rPr lang="en-US" dirty="0" err="1"/>
+              <a:t>UnionFind</a:t>
+            </a:r>
+            <a:endParaRPr lang="en-US" dirty="0"/>
+          </a:p>
+          <a:p>
+            <a:pPr lvl="1"/>
+            <a:r>
+              <a:rPr lang="en-US" dirty="0">
+                <a:hlinkClick r:id="rId2"/>
+              </a:rPr>
+              <a:t>https://leetcode.com/problems/number-of-provinces</a:t>
+            </a:r>
+            <a:r>
+              <a:rPr lang="en-US" dirty="0"/>
+              <a:t> </a:t>
+            </a:r>
+          </a:p>
+          <a:p>
+            <a:endParaRPr lang="en-US" dirty="0"/>
+          </a:p>
+        </p:txBody>
+      </p:sp>
+    </p:spTree>
+    <p:extLst>
+      <p:ext uri="{BB962C8B-B14F-4D97-AF65-F5344CB8AC3E}">
+        <p14:creationId xmlns:p14="http://schemas.microsoft.com/office/powerpoint/2010/main" val="4277885752"/>
+      </p:ext>
+    </p:extLst>
+  </p:cSld>
+  <p:clrMapOvr>
+    <a:masterClrMapping/>
+  </p:clrMapOvr>
+</p:sld>
+</file>
+
+<file path=ppt/slides/slide66.xml><?xml version="1.0" encoding="utf-8"?>
+<p:sld xmlns:a="http://schemas.openxmlformats.org/drawingml/2006/main" xmlns:r="http://schemas.openxmlformats.org/officeDocument/2006/relationships" xmlns:p="http://schemas.openxmlformats.org/presentationml/2006/main">
+  <p:cSld>
+    <p:spTree>
+      <p:nvGrpSpPr>
+        <p:cNvPr id="1" name=""/>
+        <p:cNvGrpSpPr/>
+        <p:nvPr/>
+      </p:nvGrpSpPr>
+      <p:grpSpPr>
+        <a:xfrm>
+          <a:off x="0" y="0"/>
+          <a:ext cx="0" cy="0"/>
+          <a:chOff x="0" y="0"/>
+          <a:chExt cx="0" cy="0"/>
+        </a:xfrm>
+      </p:grpSpPr>
+      <p:sp>
+        <p:nvSpPr>
+          <p:cNvPr id="2" name="Title 1">
+            <a:extLst>
+              <a:ext uri="{FF2B5EF4-FFF2-40B4-BE49-F238E27FC236}">
+                <a16:creationId xmlns:a16="http://schemas.microsoft.com/office/drawing/2014/main" id="{A8A7699D-E8F2-98C5-2DFB-554456441029}"/>
+              </a:ext>
+            </a:extLst>
+          </p:cNvPr>
+          <p:cNvSpPr>
+            <a:spLocks noGrp="1"/>
+          </p:cNvSpPr>
+          <p:nvPr>
+            <p:ph type="title"/>
+          </p:nvPr>
+        </p:nvSpPr>
+        <p:spPr/>
+        <p:txBody>
+          <a:bodyPr/>
+          <a:lstStyle/>
+          <a:p>
+            <a:r>
+              <a:rPr lang="en-US" dirty="0"/>
+              <a:t>Further Exploration</a:t>
+            </a:r>
+          </a:p>
+        </p:txBody>
+      </p:sp>
+      <p:sp>
+        <p:nvSpPr>
+          <p:cNvPr id="3" name="Content Placeholder 2">
+            <a:extLst>
+              <a:ext uri="{FF2B5EF4-FFF2-40B4-BE49-F238E27FC236}">
+                <a16:creationId xmlns:a16="http://schemas.microsoft.com/office/drawing/2014/main" id="{22F06FA3-DF82-25CD-5B25-E89EDE4496F4}"/>
+              </a:ext>
+            </a:extLst>
+          </p:cNvPr>
+          <p:cNvSpPr>
+            <a:spLocks noGrp="1"/>
+          </p:cNvSpPr>
+          <p:nvPr>
+            <p:ph idx="1"/>
+          </p:nvPr>
+        </p:nvSpPr>
+        <p:spPr/>
+        <p:txBody>
+          <a:bodyPr/>
+          <a:lstStyle/>
+          <a:p>
+            <a:r>
+              <a:rPr lang="en-US" dirty="0">
+                <a:hlinkClick r:id="rId2"/>
+              </a:rPr>
+              <a:t>https://en.wikipedia.org/wiki/Disjoint-set_data_structure#</a:t>
+            </a:r>
+            <a:endParaRPr lang="en-US" dirty="0"/>
+          </a:p>
+          <a:p>
+            <a:r>
+              <a:rPr lang="en-US" dirty="0">
+                <a:hlinkClick r:id="rId3"/>
+              </a:rPr>
+              <a:t>https://en.wikipedia.org/wiki/Ackermann_function#Inverse</a:t>
+            </a:r>
+            <a:endParaRPr lang="en-US" dirty="0"/>
+          </a:p>
+          <a:p>
+            <a:r>
+              <a:rPr lang="en-US" dirty="0">
+                <a:hlinkClick r:id="rId4"/>
+              </a:rPr>
+              <a:t>https://www.youtube.com/watch?v=92UpvDXc8fs</a:t>
+            </a:r>
+            <a:r>
+              <a:rPr lang="en-US" dirty="0"/>
+              <a:t> </a:t>
+            </a:r>
+          </a:p>
+          <a:p>
+            <a:r>
+              <a:rPr lang="en-US" dirty="0">
+                <a:hlinkClick r:id="rId5"/>
+              </a:rPr>
+              <a:t>https://www.youtube.com/watch?v=8f1XPm4WOUc</a:t>
+            </a:r>
+            <a:r>
+              <a:rPr lang="en-US" dirty="0"/>
+              <a:t> </a:t>
+            </a:r>
+          </a:p>
+        </p:txBody>
+      </p:sp>
+    </p:spTree>
+    <p:extLst>
+      <p:ext uri="{BB962C8B-B14F-4D97-AF65-F5344CB8AC3E}">
+        <p14:creationId xmlns:p14="http://schemas.microsoft.com/office/powerpoint/2010/main" val="2670685528"/>
+      </p:ext>
+    </p:extLst>
+  </p:cSld>
+  <p:clrMapOvr>
+    <a:masterClrMapping/>
+  </p:clrMapOvr>
+</p:sld>
+</file>
+
+<file path=ppt/slides/slide67.xml><?xml version="1.0" encoding="utf-8"?>
+<p:sld xmlns:a="http://schemas.openxmlformats.org/drawingml/2006/main" xmlns:r="http://schemas.openxmlformats.org/officeDocument/2006/relationships" xmlns:p="http://schemas.openxmlformats.org/presentationml/2006/main">
+  <p:cSld>
+    <p:spTree>
+      <p:nvGrpSpPr>
+        <p:cNvPr id="1" name=""/>
+        <p:cNvGrpSpPr/>
+        <p:nvPr/>
+      </p:nvGrpSpPr>
+      <p:grpSpPr>
+        <a:xfrm>
+          <a:off x="0" y="0"/>
+          <a:ext cx="0" cy="0"/>
+          <a:chOff x="0" y="0"/>
+          <a:chExt cx="0" cy="0"/>
+        </a:xfrm>
+      </p:grpSpPr>
+      <p:sp>
+        <p:nvSpPr>
+          <p:cNvPr id="4" name="Title 3">
+            <a:extLst>
+              <a:ext uri="{FF2B5EF4-FFF2-40B4-BE49-F238E27FC236}">
+                <a16:creationId xmlns:a16="http://schemas.microsoft.com/office/drawing/2014/main" id="{1AB13D4F-4B54-2CFD-45CE-D820434DD421}"/>
+              </a:ext>
+            </a:extLst>
+          </p:cNvPr>
+          <p:cNvSpPr>
+            <a:spLocks noGrp="1"/>
+          </p:cNvSpPr>
+          <p:nvPr>
+            <p:ph type="title"/>
+          </p:nvPr>
+        </p:nvSpPr>
+        <p:spPr/>
+        <p:txBody>
+          <a:bodyPr/>
+          <a:lstStyle/>
+          <a:p>
+            <a:r>
+              <a:rPr lang="en-US" dirty="0"/>
+              <a:t>These slides are work-in-progress; more will be added</a:t>
+            </a:r>
+          </a:p>
+        </p:txBody>
+      </p:sp>
+      <p:sp>
+        <p:nvSpPr>
+          <p:cNvPr id="5" name="Text Placeholder 4">
+            <a:extLst>
+              <a:ext uri="{FF2B5EF4-FFF2-40B4-BE49-F238E27FC236}">
+                <a16:creationId xmlns:a16="http://schemas.microsoft.com/office/drawing/2014/main" id="{4E8CBB95-B5A0-4E31-8197-E2631EE1CA41}"/>
+              </a:ext>
+            </a:extLst>
+          </p:cNvPr>
+          <p:cNvSpPr>
+            <a:spLocks noGrp="1"/>
+          </p:cNvSpPr>
+          <p:nvPr>
+            <p:ph type="body" idx="1"/>
+          </p:nvPr>
+        </p:nvSpPr>
+        <p:spPr/>
+        <p:txBody>
+          <a:bodyPr/>
+          <a:lstStyle/>
+          <a:p>
+            <a:endParaRPr lang="en-US"/>
+          </a:p>
+        </p:txBody>
+      </p:sp>
+    </p:spTree>
+    <p:extLst>
+      <p:ext uri="{BB962C8B-B14F-4D97-AF65-F5344CB8AC3E}">
+        <p14:creationId xmlns:p14="http://schemas.microsoft.com/office/powerpoint/2010/main" val="661472011"/>
       </p:ext>
     </p:extLst>
   </p:cSld>
